--- a/2026_SMDM/01_DES.pptx
+++ b/2026_SMDM/01_DES.pptx
@@ -885,7 +885,7 @@
           <a:p>
             <a:fld id="{E033252C-ECEF-0044-BF19-FBFB46CE84A2}" type="datetimeFigureOut">
               <a:rPr lang="en-US" smtClean="0"/>
-              <a:t>6/14/25</a:t>
+              <a:t>6/27/26</a:t>
             </a:fld>
             <a:endParaRPr lang="en-US"/>
           </a:p>
@@ -1236,6 +1236,90 @@
 </p:notes>
 </file>
 
+<file path=ppt/notesSlides/notesSlide10.xml><?xml version="1.0" encoding="utf-8"?>
+<p:notes xmlns:a="http://schemas.openxmlformats.org/drawingml/2006/main" xmlns:r="http://schemas.openxmlformats.org/officeDocument/2006/relationships" xmlns:p="http://schemas.openxmlformats.org/presentationml/2006/main">
+  <p:cSld>
+    <p:spTree>
+      <p:nvGrpSpPr>
+        <p:cNvPr id="1" name=""/>
+        <p:cNvGrpSpPr/>
+        <p:nvPr/>
+      </p:nvGrpSpPr>
+      <p:grpSpPr>
+        <a:xfrm>
+          <a:off x="0" y="0"/>
+          <a:ext cx="0" cy="0"/>
+          <a:chOff x="0" y="0"/>
+          <a:chExt cx="0" cy="0"/>
+        </a:xfrm>
+      </p:grpSpPr>
+      <p:sp>
+        <p:nvSpPr>
+          <p:cNvPr id="2" name="Slide Image Placeholder 1"/>
+          <p:cNvSpPr>
+            <a:spLocks noGrp="1" noRot="1" noChangeAspect="1"/>
+          </p:cNvSpPr>
+          <p:nvPr>
+            <p:ph type="sldImg"/>
+          </p:nvPr>
+        </p:nvSpPr>
+        <p:spPr/>
+      </p:sp>
+      <p:sp>
+        <p:nvSpPr>
+          <p:cNvPr id="3" name="Notes Placeholder 2"/>
+          <p:cNvSpPr>
+            <a:spLocks noGrp="1"/>
+          </p:cNvSpPr>
+          <p:nvPr>
+            <p:ph type="body" idx="1"/>
+          </p:nvPr>
+        </p:nvSpPr>
+        <p:spPr/>
+        <p:txBody>
+          <a:bodyPr/>
+          <a:lstStyle/>
+          <a:p>
+            <a:endParaRPr lang="en-US"/>
+          </a:p>
+        </p:txBody>
+      </p:sp>
+      <p:sp>
+        <p:nvSpPr>
+          <p:cNvPr id="4" name="Slide Number Placeholder 3"/>
+          <p:cNvSpPr>
+            <a:spLocks noGrp="1"/>
+          </p:cNvSpPr>
+          <p:nvPr>
+            <p:ph type="sldNum" sz="quarter" idx="5"/>
+          </p:nvPr>
+        </p:nvSpPr>
+        <p:spPr/>
+        <p:txBody>
+          <a:bodyPr/>
+          <a:lstStyle/>
+          <a:p>
+            <a:fld id="{96010A50-4423-6040-9AE0-885D13F9C550}" type="slidenum">
+              <a:rPr lang="en-US" smtClean="0"/>
+              <a:t>27</a:t>
+            </a:fld>
+            <a:endParaRPr lang="en-US"/>
+          </a:p>
+        </p:txBody>
+      </p:sp>
+    </p:spTree>
+    <p:extLst>
+      <p:ext uri="{BB962C8B-B14F-4D97-AF65-F5344CB8AC3E}">
+        <p14:creationId xmlns:p14="http://schemas.microsoft.com/office/powerpoint/2010/main" val="623334237"/>
+      </p:ext>
+    </p:extLst>
+  </p:cSld>
+  <p:clrMapOvr>
+    <a:masterClrMapping/>
+  </p:clrMapOvr>
+</p:notes>
+</file>
+
 <file path=ppt/notesSlides/notesSlide2.xml><?xml version="1.0" encoding="utf-8"?>
 <p:notes xmlns:a="http://schemas.openxmlformats.org/drawingml/2006/main" xmlns:r="http://schemas.openxmlformats.org/officeDocument/2006/relationships" xmlns:p="http://schemas.openxmlformats.org/presentationml/2006/main">
   <p:cSld>
@@ -2157,7 +2241,7 @@
           <a:p>
             <a:fld id="{6A8FB48A-BFC4-2846-8228-6201ABA4D0C5}" type="datetimeFigureOut">
               <a:rPr lang="en-US" smtClean="0"/>
-              <a:t>6/14/25</a:t>
+              <a:t>6/27/26</a:t>
             </a:fld>
             <a:endParaRPr lang="en-US"/>
           </a:p>
@@ -2355,7 +2439,7 @@
           <a:p>
             <a:fld id="{6A8FB48A-BFC4-2846-8228-6201ABA4D0C5}" type="datetimeFigureOut">
               <a:rPr lang="en-US" smtClean="0"/>
-              <a:t>6/14/25</a:t>
+              <a:t>6/27/26</a:t>
             </a:fld>
             <a:endParaRPr lang="en-US"/>
           </a:p>
@@ -2563,7 +2647,7 @@
           <a:p>
             <a:fld id="{6A8FB48A-BFC4-2846-8228-6201ABA4D0C5}" type="datetimeFigureOut">
               <a:rPr lang="en-US" smtClean="0"/>
-              <a:t>6/14/25</a:t>
+              <a:t>6/27/26</a:t>
             </a:fld>
             <a:endParaRPr lang="en-US"/>
           </a:p>
@@ -2761,7 +2845,7 @@
           <a:p>
             <a:fld id="{6A8FB48A-BFC4-2846-8228-6201ABA4D0C5}" type="datetimeFigureOut">
               <a:rPr lang="en-US" smtClean="0"/>
-              <a:t>6/14/25</a:t>
+              <a:t>6/27/26</a:t>
             </a:fld>
             <a:endParaRPr lang="en-US"/>
           </a:p>
@@ -3036,7 +3120,7 @@
           <a:p>
             <a:fld id="{6A8FB48A-BFC4-2846-8228-6201ABA4D0C5}" type="datetimeFigureOut">
               <a:rPr lang="en-US" smtClean="0"/>
-              <a:t>6/14/25</a:t>
+              <a:t>6/27/26</a:t>
             </a:fld>
             <a:endParaRPr lang="en-US"/>
           </a:p>
@@ -3301,7 +3385,7 @@
           <a:p>
             <a:fld id="{6A8FB48A-BFC4-2846-8228-6201ABA4D0C5}" type="datetimeFigureOut">
               <a:rPr lang="en-US" smtClean="0"/>
-              <a:t>6/14/25</a:t>
+              <a:t>6/27/26</a:t>
             </a:fld>
             <a:endParaRPr lang="en-US"/>
           </a:p>
@@ -3713,7 +3797,7 @@
           <a:p>
             <a:fld id="{6A8FB48A-BFC4-2846-8228-6201ABA4D0C5}" type="datetimeFigureOut">
               <a:rPr lang="en-US" smtClean="0"/>
-              <a:t>6/14/25</a:t>
+              <a:t>6/27/26</a:t>
             </a:fld>
             <a:endParaRPr lang="en-US"/>
           </a:p>
@@ -3854,7 +3938,7 @@
           <a:p>
             <a:fld id="{6A8FB48A-BFC4-2846-8228-6201ABA4D0C5}" type="datetimeFigureOut">
               <a:rPr lang="en-US" smtClean="0"/>
-              <a:t>6/14/25</a:t>
+              <a:t>6/27/26</a:t>
             </a:fld>
             <a:endParaRPr lang="en-US"/>
           </a:p>
@@ -3967,7 +4051,7 @@
           <a:p>
             <a:fld id="{6A8FB48A-BFC4-2846-8228-6201ABA4D0C5}" type="datetimeFigureOut">
               <a:rPr lang="en-US" smtClean="0"/>
-              <a:t>6/14/25</a:t>
+              <a:t>6/27/26</a:t>
             </a:fld>
             <a:endParaRPr lang="en-US"/>
           </a:p>
@@ -4278,7 +4362,7 @@
           <a:p>
             <a:fld id="{6A8FB48A-BFC4-2846-8228-6201ABA4D0C5}" type="datetimeFigureOut">
               <a:rPr lang="en-US" smtClean="0"/>
-              <a:t>6/14/25</a:t>
+              <a:t>6/27/26</a:t>
             </a:fld>
             <a:endParaRPr lang="en-US"/>
           </a:p>
@@ -4566,7 +4650,7 @@
           <a:p>
             <a:fld id="{6A8FB48A-BFC4-2846-8228-6201ABA4D0C5}" type="datetimeFigureOut">
               <a:rPr lang="en-US" smtClean="0"/>
-              <a:t>6/14/25</a:t>
+              <a:t>6/27/26</a:t>
             </a:fld>
             <a:endParaRPr lang="en-US"/>
           </a:p>
@@ -4807,7 +4891,7 @@
           <a:p>
             <a:fld id="{6A8FB48A-BFC4-2846-8228-6201ABA4D0C5}" type="datetimeFigureOut">
               <a:rPr lang="en-US" smtClean="0"/>
-              <a:t>6/14/25</a:t>
+              <a:t>6/27/26</a:t>
             </a:fld>
             <a:endParaRPr lang="en-US"/>
           </a:p>
@@ -5224,668 +5308,6 @@
           <a:chExt cx="0" cy="0"/>
         </a:xfrm>
       </p:grpSpPr>
-      <p:graphicFrame>
-        <p:nvGraphicFramePr>
-          <p:cNvPr id="4" name="Content Placeholder 3">
-            <a:extLst>
-              <a:ext uri="{FF2B5EF4-FFF2-40B4-BE49-F238E27FC236}">
-                <a16:creationId xmlns:a16="http://schemas.microsoft.com/office/drawing/2014/main" id="{672125A1-A8AB-CFA0-C54F-8A364765CC43}"/>
-              </a:ext>
-            </a:extLst>
-          </p:cNvPr>
-          <p:cNvGraphicFramePr>
-            <a:graphicFrameLocks noGrp="1"/>
-          </p:cNvGraphicFramePr>
-          <p:nvPr>
-            <p:ph idx="1"/>
-          </p:nvPr>
-        </p:nvGraphicFramePr>
-        <p:xfrm>
-          <a:off x="1208690" y="942340"/>
-          <a:ext cx="10720551" cy="4973320"/>
-        </p:xfrm>
-        <a:graphic>
-          <a:graphicData uri="http://schemas.openxmlformats.org/drawingml/2006/table">
-            <a:tbl>
-              <a:tblPr firstRow="1" bandRow="1">
-                <a:tableStyleId>{21E4AEA4-8DFA-4A89-87EB-49C32662AFE0}</a:tableStyleId>
-              </a:tblPr>
-              <a:tblGrid>
-                <a:gridCol w="1717110">
-                  <a:extLst>
-                    <a:ext uri="{9D8B030D-6E8A-4147-A177-3AD203B41FA5}">
-                      <a16:colId xmlns:a16="http://schemas.microsoft.com/office/drawing/2014/main" val="4182014441"/>
-                    </a:ext>
-                  </a:extLst>
-                </a:gridCol>
-                <a:gridCol w="5976462">
-                  <a:extLst>
-                    <a:ext uri="{9D8B030D-6E8A-4147-A177-3AD203B41FA5}">
-                      <a16:colId xmlns:a16="http://schemas.microsoft.com/office/drawing/2014/main" val="906180283"/>
-                    </a:ext>
-                  </a:extLst>
-                </a:gridCol>
-                <a:gridCol w="3026979">
-                  <a:extLst>
-                    <a:ext uri="{9D8B030D-6E8A-4147-A177-3AD203B41FA5}">
-                      <a16:colId xmlns:a16="http://schemas.microsoft.com/office/drawing/2014/main" val="2769721792"/>
-                    </a:ext>
-                  </a:extLst>
-                </a:gridCol>
-              </a:tblGrid>
-              <a:tr h="370840">
-                <a:tc>
-                  <a:txBody>
-                    <a:bodyPr/>
-                    <a:lstStyle/>
-                    <a:p>
-                      <a:r>
-                        <a:rPr lang="en-US" dirty="0"/>
-                        <a:t>Time</a:t>
-                      </a:r>
-                    </a:p>
-                  </a:txBody>
-                  <a:tcPr/>
-                </a:tc>
-                <a:tc>
-                  <a:txBody>
-                    <a:bodyPr/>
-                    <a:lstStyle/>
-                    <a:p>
-                      <a:r>
-                        <a:rPr lang="en-US" dirty="0"/>
-                        <a:t>Description</a:t>
-                      </a:r>
-                    </a:p>
-                  </a:txBody>
-                  <a:tcPr/>
-                </a:tc>
-                <a:tc>
-                  <a:txBody>
-                    <a:bodyPr/>
-                    <a:lstStyle/>
-                    <a:p>
-                      <a:r>
-                        <a:rPr lang="en-US" dirty="0"/>
-                        <a:t>Discussant</a:t>
-                      </a:r>
-                    </a:p>
-                  </a:txBody>
-                  <a:tcPr/>
-                </a:tc>
-                <a:extLst>
-                  <a:ext uri="{0D108BD9-81ED-4DB2-BD59-A6C34878D82A}">
-                    <a16:rowId xmlns:a16="http://schemas.microsoft.com/office/drawing/2014/main" val="1700444250"/>
-                  </a:ext>
-                </a:extLst>
-              </a:tr>
-              <a:tr h="370840">
-                <a:tc>
-                  <a:txBody>
-                    <a:bodyPr/>
-                    <a:lstStyle/>
-                    <a:p>
-                      <a:r>
-                        <a:rPr lang="en-US" dirty="0"/>
-                        <a:t>[15 min]</a:t>
-                      </a:r>
-                    </a:p>
-                  </a:txBody>
-                  <a:tcPr/>
-                </a:tc>
-                <a:tc>
-                  <a:txBody>
-                    <a:bodyPr/>
-                    <a:lstStyle/>
-                    <a:p>
-                      <a:r>
-                        <a:rPr lang="en-US" sz="1800" kern="1200" dirty="0">
-                          <a:solidFill>
-                            <a:schemeClr val="dk1"/>
-                          </a:solidFill>
-                          <a:effectLst/>
-                          <a:latin typeface="+mn-lt"/>
-                          <a:ea typeface="+mn-ea"/>
-                          <a:cs typeface="+mn-cs"/>
-                        </a:rPr>
-                        <a:t>(0) Introductions and administrivia </a:t>
-                      </a:r>
-                      <a:endParaRPr lang="en-US" dirty="0"/>
-                    </a:p>
-                  </a:txBody>
-                  <a:tcPr/>
-                </a:tc>
-                <a:tc>
-                  <a:txBody>
-                    <a:bodyPr/>
-                    <a:lstStyle/>
-                    <a:p>
-                      <a:r>
-                        <a:rPr lang="en-US" dirty="0" err="1"/>
-                        <a:t>Trikalinos</a:t>
-                      </a:r>
-                      <a:endParaRPr lang="en-US" dirty="0"/>
-                    </a:p>
-                  </a:txBody>
-                  <a:tcPr/>
-                </a:tc>
-                <a:extLst>
-                  <a:ext uri="{0D108BD9-81ED-4DB2-BD59-A6C34878D82A}">
-                    <a16:rowId xmlns:a16="http://schemas.microsoft.com/office/drawing/2014/main" val="2490995723"/>
-                  </a:ext>
-                </a:extLst>
-              </a:tr>
-              <a:tr h="370840">
-                <a:tc>
-                  <a:txBody>
-                    <a:bodyPr/>
-                    <a:lstStyle/>
-                    <a:p>
-                      <a:r>
-                        <a:rPr lang="en-US" dirty="0"/>
-                        <a:t>[25 min]</a:t>
-                      </a:r>
-                    </a:p>
-                  </a:txBody>
-                  <a:tcPr/>
-                </a:tc>
-                <a:tc>
-                  <a:txBody>
-                    <a:bodyPr/>
-                    <a:lstStyle/>
-                    <a:p>
-                      <a:r>
-                        <a:rPr lang="en-US" sz="1800" kern="1200" dirty="0">
-                          <a:solidFill>
-                            <a:schemeClr val="dk1"/>
-                          </a:solidFill>
-                          <a:effectLst/>
-                          <a:latin typeface="+mn-lt"/>
-                          <a:ea typeface="+mn-ea"/>
-                          <a:cs typeface="+mn-cs"/>
-                        </a:rPr>
-                        <a:t>(1) DES as a composition of point processes</a:t>
-                      </a:r>
-                    </a:p>
-                  </a:txBody>
-                  <a:tcPr/>
-                </a:tc>
-                <a:tc>
-                  <a:txBody>
-                    <a:bodyPr/>
-                    <a:lstStyle/>
-                    <a:p>
-                      <a:r>
-                        <a:rPr lang="en-US" dirty="0" err="1"/>
-                        <a:t>Alarid</a:t>
-                      </a:r>
-                      <a:r>
-                        <a:rPr lang="en-US" dirty="0"/>
-                        <a:t>-Escudero</a:t>
-                      </a:r>
-                    </a:p>
-                  </a:txBody>
-                  <a:tcPr/>
-                </a:tc>
-                <a:extLst>
-                  <a:ext uri="{0D108BD9-81ED-4DB2-BD59-A6C34878D82A}">
-                    <a16:rowId xmlns:a16="http://schemas.microsoft.com/office/drawing/2014/main" val="2065491183"/>
-                  </a:ext>
-                </a:extLst>
-              </a:tr>
-              <a:tr h="370840">
-                <a:tc>
-                  <a:txBody>
-                    <a:bodyPr/>
-                    <a:lstStyle/>
-                    <a:p>
-                      <a:r>
-                        <a:rPr lang="en-US" dirty="0"/>
-                        <a:t>[30 min]</a:t>
-                      </a:r>
-                    </a:p>
-                  </a:txBody>
-                  <a:tcPr/>
-                </a:tc>
-                <a:tc>
-                  <a:txBody>
-                    <a:bodyPr/>
-                    <a:lstStyle/>
-                    <a:p>
-                      <a:pPr marL="0" marR="0" lvl="0" indent="0" algn="l" defTabSz="914400" rtl="0" eaLnBrk="1" fontAlgn="auto" latinLnBrk="0" hangingPunct="1">
-                        <a:lnSpc>
-                          <a:spcPct val="100000"/>
-                        </a:lnSpc>
-                        <a:spcBef>
-                          <a:spcPts val="0"/>
-                        </a:spcBef>
-                        <a:spcAft>
-                          <a:spcPts val="0"/>
-                        </a:spcAft>
-                        <a:buClrTx/>
-                        <a:buSzTx/>
-                        <a:buFontTx/>
-                        <a:buNone/>
-                        <a:tabLst/>
-                        <a:defRPr/>
-                      </a:pPr>
-                      <a:r>
-                        <a:rPr lang="en-US" sz="1800" kern="1200" dirty="0">
-                          <a:solidFill>
-                            <a:schemeClr val="dk1"/>
-                          </a:solidFill>
-                          <a:effectLst/>
-                          <a:latin typeface="+mn-lt"/>
-                          <a:ea typeface="+mn-ea"/>
-                          <a:cs typeface="+mn-cs"/>
-                        </a:rPr>
-                        <a:t>(2) NHPPPs – key properties</a:t>
-                      </a:r>
-                    </a:p>
-                  </a:txBody>
-                  <a:tcPr/>
-                </a:tc>
-                <a:tc>
-                  <a:txBody>
-                    <a:bodyPr/>
-                    <a:lstStyle/>
-                    <a:p>
-                      <a:r>
-                        <a:rPr lang="en-US" dirty="0" err="1"/>
-                        <a:t>Trikalinos</a:t>
-                      </a:r>
-                      <a:endParaRPr lang="en-US" dirty="0"/>
-                    </a:p>
-                  </a:txBody>
-                  <a:tcPr/>
-                </a:tc>
-                <a:extLst>
-                  <a:ext uri="{0D108BD9-81ED-4DB2-BD59-A6C34878D82A}">
-                    <a16:rowId xmlns:a16="http://schemas.microsoft.com/office/drawing/2014/main" val="2757944147"/>
-                  </a:ext>
-                </a:extLst>
-              </a:tr>
-              <a:tr h="370840">
-                <a:tc>
-                  <a:txBody>
-                    <a:bodyPr/>
-                    <a:lstStyle/>
-                    <a:p>
-                      <a:r>
-                        <a:rPr lang="en-US" dirty="0"/>
-                        <a:t>[30 min]</a:t>
-                      </a:r>
-                    </a:p>
-                  </a:txBody>
-                  <a:tcPr/>
-                </a:tc>
-                <a:tc>
-                  <a:txBody>
-                    <a:bodyPr/>
-                    <a:lstStyle/>
-                    <a:p>
-                      <a:r>
-                        <a:rPr lang="en-US" sz="1800" kern="1200" dirty="0">
-                          <a:solidFill>
-                            <a:schemeClr val="dk1"/>
-                          </a:solidFill>
-                          <a:effectLst/>
-                          <a:latin typeface="+mn-lt"/>
-                          <a:ea typeface="+mn-ea"/>
-                          <a:cs typeface="+mn-cs"/>
-                        </a:rPr>
-                        <a:t>(3) Sampling from NHPPPs</a:t>
-                      </a:r>
-                      <a:endParaRPr lang="en-US" dirty="0"/>
-                    </a:p>
-                  </a:txBody>
-                  <a:tcPr/>
-                </a:tc>
-                <a:tc>
-                  <a:txBody>
-                    <a:bodyPr/>
-                    <a:lstStyle/>
-                    <a:p>
-                      <a:r>
-                        <a:rPr lang="en-US" dirty="0" err="1"/>
-                        <a:t>Sereda</a:t>
-                      </a:r>
-                      <a:endParaRPr lang="en-US" dirty="0"/>
-                    </a:p>
-                  </a:txBody>
-                  <a:tcPr/>
-                </a:tc>
-                <a:extLst>
-                  <a:ext uri="{0D108BD9-81ED-4DB2-BD59-A6C34878D82A}">
-                    <a16:rowId xmlns:a16="http://schemas.microsoft.com/office/drawing/2014/main" val="1442363784"/>
-                  </a:ext>
-                </a:extLst>
-              </a:tr>
-              <a:tr h="370840">
-                <a:tc>
-                  <a:txBody>
-                    <a:bodyPr/>
-                    <a:lstStyle/>
-                    <a:p>
-                      <a:r>
-                        <a:rPr lang="en-US" dirty="0"/>
-                        <a:t>[15 min]</a:t>
-                      </a:r>
-                    </a:p>
-                  </a:txBody>
-                  <a:tcPr/>
-                </a:tc>
-                <a:tc>
-                  <a:txBody>
-                    <a:bodyPr/>
-                    <a:lstStyle/>
-                    <a:p>
-                      <a:pPr marL="0" marR="0" lvl="0" indent="0" algn="l" defTabSz="914400" rtl="0" eaLnBrk="1" fontAlgn="auto" latinLnBrk="0" hangingPunct="1">
-                        <a:lnSpc>
-                          <a:spcPct val="100000"/>
-                        </a:lnSpc>
-                        <a:spcBef>
-                          <a:spcPts val="0"/>
-                        </a:spcBef>
-                        <a:spcAft>
-                          <a:spcPts val="0"/>
-                        </a:spcAft>
-                        <a:buClrTx/>
-                        <a:buSzTx/>
-                        <a:buFontTx/>
-                        <a:buNone/>
-                        <a:tabLst/>
-                        <a:defRPr/>
-                      </a:pPr>
-                      <a:r>
-                        <a:rPr lang="en-US" b="1" dirty="0"/>
-                        <a:t>Break</a:t>
-                      </a:r>
-                    </a:p>
-                  </a:txBody>
-                  <a:tcPr/>
-                </a:tc>
-                <a:tc>
-                  <a:txBody>
-                    <a:bodyPr/>
-                    <a:lstStyle/>
-                    <a:p>
-                      <a:endParaRPr lang="en-US" dirty="0"/>
-                    </a:p>
-                  </a:txBody>
-                  <a:tcPr/>
-                </a:tc>
-                <a:extLst>
-                  <a:ext uri="{0D108BD9-81ED-4DB2-BD59-A6C34878D82A}">
-                    <a16:rowId xmlns:a16="http://schemas.microsoft.com/office/drawing/2014/main" val="1269228105"/>
-                  </a:ext>
-                </a:extLst>
-              </a:tr>
-              <a:tr h="370840">
-                <a:tc>
-                  <a:txBody>
-                    <a:bodyPr/>
-                    <a:lstStyle/>
-                    <a:p>
-                      <a:r>
-                        <a:rPr lang="en-US" dirty="0"/>
-                        <a:t>[80 min]</a:t>
-                      </a:r>
-                    </a:p>
-                  </a:txBody>
-                  <a:tcPr/>
-                </a:tc>
-                <a:tc>
-                  <a:txBody>
-                    <a:bodyPr/>
-                    <a:lstStyle/>
-                    <a:p>
-                      <a:r>
-                        <a:rPr lang="en-US" sz="1800" kern="1200" dirty="0">
-                          <a:solidFill>
-                            <a:schemeClr val="dk1"/>
-                          </a:solidFill>
-                          <a:effectLst/>
-                          <a:latin typeface="+mn-lt"/>
-                          <a:ea typeface="+mn-ea"/>
-                          <a:cs typeface="+mn-cs"/>
-                        </a:rPr>
-                        <a:t>(4) Guided exercise: </a:t>
-                      </a:r>
-                    </a:p>
-                    <a:p>
-                      <a:pPr marL="285750" indent="-285750">
-                        <a:buFontTx/>
-                        <a:buChar char="-"/>
-                      </a:pPr>
-                      <a:r>
-                        <a:rPr lang="en-US" sz="1800" kern="1200" dirty="0">
-                          <a:solidFill>
-                            <a:schemeClr val="dk1"/>
-                          </a:solidFill>
-                          <a:effectLst/>
-                          <a:latin typeface="+mn-lt"/>
-                          <a:ea typeface="+mn-ea"/>
-                          <a:cs typeface="+mn-cs"/>
-                        </a:rPr>
-                        <a:t>Implement a simple cancer natural history DES for one person</a:t>
-                      </a:r>
-                    </a:p>
-                    <a:p>
-                      <a:pPr marL="285750" indent="-285750">
-                        <a:buFontTx/>
-                        <a:buChar char="-"/>
-                      </a:pPr>
-                      <a:r>
-                        <a:rPr lang="en-US" sz="1800" kern="1200" dirty="0">
-                          <a:solidFill>
-                            <a:schemeClr val="dk1"/>
-                          </a:solidFill>
-                          <a:effectLst/>
-                          <a:latin typeface="+mn-lt"/>
-                          <a:ea typeface="+mn-ea"/>
-                          <a:cs typeface="+mn-cs"/>
-                        </a:rPr>
-                        <a:t>The many-person case</a:t>
-                      </a:r>
-                    </a:p>
-                    <a:p>
-                      <a:pPr marL="285750" indent="-285750">
-                        <a:buFontTx/>
-                        <a:buChar char="-"/>
-                      </a:pPr>
-                      <a:r>
-                        <a:rPr lang="en-US" sz="1800" kern="1200" dirty="0">
-                          <a:solidFill>
-                            <a:schemeClr val="dk1"/>
-                          </a:solidFill>
-                          <a:effectLst/>
-                          <a:latin typeface="+mn-lt"/>
-                          <a:ea typeface="+mn-ea"/>
-                          <a:cs typeface="+mn-cs"/>
-                        </a:rPr>
-                        <a:t>Packaging </a:t>
-                      </a:r>
-                    </a:p>
-                  </a:txBody>
-                  <a:tcPr/>
-                </a:tc>
-                <a:tc>
-                  <a:txBody>
-                    <a:bodyPr/>
-                    <a:lstStyle/>
-                    <a:p>
-                      <a:r>
-                        <a:rPr lang="en-US" dirty="0"/>
-                        <a:t>[All]</a:t>
-                      </a:r>
-                    </a:p>
-                    <a:p>
-                      <a:r>
-                        <a:rPr lang="en-US" dirty="0" err="1"/>
-                        <a:t>Chrysanthopoulou</a:t>
-                      </a:r>
-                      <a:endParaRPr lang="en-US" dirty="0"/>
-                    </a:p>
-                    <a:p>
-                      <a:endParaRPr lang="en-US" dirty="0"/>
-                    </a:p>
-                    <a:p>
-                      <a:r>
-                        <a:rPr lang="en-US" dirty="0" err="1"/>
-                        <a:t>Sereda</a:t>
-                      </a:r>
-                      <a:r>
-                        <a:rPr lang="en-US" dirty="0"/>
-                        <a:t>/</a:t>
-                      </a:r>
-                      <a:r>
-                        <a:rPr lang="en-US" dirty="0" err="1"/>
-                        <a:t>Alarid</a:t>
-                      </a:r>
-                      <a:r>
-                        <a:rPr lang="en-US" dirty="0"/>
-                        <a:t>-Escudero</a:t>
-                      </a:r>
-                    </a:p>
-                    <a:p>
-                      <a:r>
-                        <a:rPr lang="en-US" dirty="0" err="1"/>
-                        <a:t>Trikalinos</a:t>
-                      </a:r>
-                      <a:endParaRPr lang="en-US" dirty="0"/>
-                    </a:p>
-                  </a:txBody>
-                  <a:tcPr/>
-                </a:tc>
-                <a:extLst>
-                  <a:ext uri="{0D108BD9-81ED-4DB2-BD59-A6C34878D82A}">
-                    <a16:rowId xmlns:a16="http://schemas.microsoft.com/office/drawing/2014/main" val="1448491104"/>
-                  </a:ext>
-                </a:extLst>
-              </a:tr>
-              <a:tr h="370840">
-                <a:tc>
-                  <a:txBody>
-                    <a:bodyPr/>
-                    <a:lstStyle/>
-                    <a:p>
-                      <a:r>
-                        <a:rPr lang="en-US" dirty="0"/>
-                        <a:t>[10 min]</a:t>
-                      </a:r>
-                    </a:p>
-                  </a:txBody>
-                  <a:tcPr/>
-                </a:tc>
-                <a:tc>
-                  <a:txBody>
-                    <a:bodyPr/>
-                    <a:lstStyle/>
-                    <a:p>
-                      <a:pPr marL="0" marR="0" lvl="0" indent="0" algn="l" defTabSz="914400" rtl="0" eaLnBrk="1" fontAlgn="auto" latinLnBrk="0" hangingPunct="1">
-                        <a:lnSpc>
-                          <a:spcPct val="100000"/>
-                        </a:lnSpc>
-                        <a:spcBef>
-                          <a:spcPts val="0"/>
-                        </a:spcBef>
-                        <a:spcAft>
-                          <a:spcPts val="0"/>
-                        </a:spcAft>
-                        <a:buClrTx/>
-                        <a:buSzTx/>
-                        <a:buFontTx/>
-                        <a:buNone/>
-                        <a:tabLst/>
-                        <a:defRPr/>
-                      </a:pPr>
-                      <a:r>
-                        <a:rPr lang="en-US" sz="1800" kern="1200" dirty="0">
-                          <a:solidFill>
-                            <a:schemeClr val="dk1"/>
-                          </a:solidFill>
-                          <a:effectLst/>
-                          <a:latin typeface="+mn-lt"/>
-                          <a:ea typeface="+mn-ea"/>
-                          <a:cs typeface="+mn-cs"/>
-                        </a:rPr>
-                        <a:t>(5) Advanced Topic Teaser on self-excitatory processes: point processes that are not NHPPPs and when you may need them</a:t>
-                      </a:r>
-                    </a:p>
-                  </a:txBody>
-                  <a:tcPr/>
-                </a:tc>
-                <a:tc>
-                  <a:txBody>
-                    <a:bodyPr/>
-                    <a:lstStyle/>
-                    <a:p>
-                      <a:r>
-                        <a:rPr lang="en-US" dirty="0" err="1"/>
-                        <a:t>Trikalinos</a:t>
-                      </a:r>
-                      <a:endParaRPr lang="en-US" dirty="0"/>
-                    </a:p>
-                  </a:txBody>
-                  <a:tcPr/>
-                </a:tc>
-                <a:extLst>
-                  <a:ext uri="{0D108BD9-81ED-4DB2-BD59-A6C34878D82A}">
-                    <a16:rowId xmlns:a16="http://schemas.microsoft.com/office/drawing/2014/main" val="3766472740"/>
-                  </a:ext>
-                </a:extLst>
-              </a:tr>
-              <a:tr h="370840">
-                <a:tc>
-                  <a:txBody>
-                    <a:bodyPr/>
-                    <a:lstStyle/>
-                    <a:p>
-                      <a:r>
-                        <a:rPr lang="en-US" dirty="0"/>
-                        <a:t>[15 min]</a:t>
-                      </a:r>
-                    </a:p>
-                  </a:txBody>
-                  <a:tcPr/>
-                </a:tc>
-                <a:tc>
-                  <a:txBody>
-                    <a:bodyPr/>
-                    <a:lstStyle/>
-                    <a:p>
-                      <a:r>
-                        <a:rPr lang="en-US" dirty="0"/>
-                        <a:t>General Q &amp; A</a:t>
-                      </a:r>
-                    </a:p>
-                  </a:txBody>
-                  <a:tcPr/>
-                </a:tc>
-                <a:tc>
-                  <a:txBody>
-                    <a:bodyPr/>
-                    <a:lstStyle/>
-                    <a:p>
-                      <a:r>
-                        <a:rPr lang="en-US" dirty="0"/>
-                        <a:t>All</a:t>
-                      </a:r>
-                    </a:p>
-                  </a:txBody>
-                  <a:tcPr/>
-                </a:tc>
-                <a:extLst>
-                  <a:ext uri="{0D108BD9-81ED-4DB2-BD59-A6C34878D82A}">
-                    <a16:rowId xmlns:a16="http://schemas.microsoft.com/office/drawing/2014/main" val="3034331301"/>
-                  </a:ext>
-                </a:extLst>
-              </a:tr>
-            </a:tbl>
-          </a:graphicData>
-        </a:graphic>
-      </p:graphicFrame>
       <p:sp>
         <p:nvSpPr>
           <p:cNvPr id="5" name="Right Arrow 4">
@@ -5939,12 +5361,1437 @@
           </a:p>
         </p:txBody>
       </p:sp>
+      <mc:AlternateContent xmlns:mc="http://schemas.openxmlformats.org/markup-compatibility/2006">
+        <mc:Choice xmlns:a14="http://schemas.microsoft.com/office/drawing/2010/main" Requires="a14">
+          <p:graphicFrame>
+            <p:nvGraphicFramePr>
+              <p:cNvPr id="7" name="Content Placeholder 3">
+                <a:extLst>
+                  <a:ext uri="{FF2B5EF4-FFF2-40B4-BE49-F238E27FC236}">
+                    <a16:creationId xmlns:a16="http://schemas.microsoft.com/office/drawing/2014/main" id="{3D80CB97-9DD4-F667-6F4E-6D43FF3659EC}"/>
+                  </a:ext>
+                </a:extLst>
+              </p:cNvPr>
+              <p:cNvGraphicFramePr>
+                <a:graphicFrameLocks/>
+              </p:cNvGraphicFramePr>
+              <p:nvPr>
+                <p:extLst>
+                  <p:ext uri="{D42A27DB-BD31-4B8C-83A1-F6EECF244321}">
+                    <p14:modId xmlns:p14="http://schemas.microsoft.com/office/powerpoint/2010/main" val="260976388"/>
+                  </p:ext>
+                </p:extLst>
+              </p:nvPr>
+            </p:nvGraphicFramePr>
+            <p:xfrm>
+              <a:off x="1208690" y="942340"/>
+              <a:ext cx="10720551" cy="4699000"/>
+            </p:xfrm>
+            <a:graphic>
+              <a:graphicData uri="http://schemas.openxmlformats.org/drawingml/2006/table">
+                <a:tbl>
+                  <a:tblPr firstRow="1" bandRow="1">
+                    <a:tableStyleId>{21E4AEA4-8DFA-4A89-87EB-49C32662AFE0}</a:tableStyleId>
+                  </a:tblPr>
+                  <a:tblGrid>
+                    <a:gridCol w="1717110">
+                      <a:extLst>
+                        <a:ext uri="{9D8B030D-6E8A-4147-A177-3AD203B41FA5}">
+                          <a16:colId xmlns:a16="http://schemas.microsoft.com/office/drawing/2014/main" val="4182014441"/>
+                        </a:ext>
+                      </a:extLst>
+                    </a:gridCol>
+                    <a:gridCol w="5976462">
+                      <a:extLst>
+                        <a:ext uri="{9D8B030D-6E8A-4147-A177-3AD203B41FA5}">
+                          <a16:colId xmlns:a16="http://schemas.microsoft.com/office/drawing/2014/main" val="906180283"/>
+                        </a:ext>
+                      </a:extLst>
+                    </a:gridCol>
+                    <a:gridCol w="3026979">
+                      <a:extLst>
+                        <a:ext uri="{9D8B030D-6E8A-4147-A177-3AD203B41FA5}">
+                          <a16:colId xmlns:a16="http://schemas.microsoft.com/office/drawing/2014/main" val="2769721792"/>
+                        </a:ext>
+                      </a:extLst>
+                    </a:gridCol>
+                  </a:tblGrid>
+                  <a:tr h="370840">
+                    <a:tc>
+                      <a:txBody>
+                        <a:bodyPr/>
+                        <a:lstStyle/>
+                        <a:p>
+                          <a:r>
+                            <a:rPr lang="en-US" dirty="0"/>
+                            <a:t>Time</a:t>
+                          </a:r>
+                        </a:p>
+                      </a:txBody>
+                      <a:tcPr/>
+                    </a:tc>
+                    <a:tc>
+                      <a:txBody>
+                        <a:bodyPr/>
+                        <a:lstStyle/>
+                        <a:p>
+                          <a:r>
+                            <a:rPr lang="en-US" dirty="0"/>
+                            <a:t>Description</a:t>
+                          </a:r>
+                        </a:p>
+                      </a:txBody>
+                      <a:tcPr/>
+                    </a:tc>
+                    <a:tc>
+                      <a:txBody>
+                        <a:bodyPr/>
+                        <a:lstStyle/>
+                        <a:p>
+                          <a:r>
+                            <a:rPr lang="en-US" dirty="0"/>
+                            <a:t>Discussant</a:t>
+                          </a:r>
+                        </a:p>
+                      </a:txBody>
+                      <a:tcPr/>
+                    </a:tc>
+                    <a:extLst>
+                      <a:ext uri="{0D108BD9-81ED-4DB2-BD59-A6C34878D82A}">
+                        <a16:rowId xmlns:a16="http://schemas.microsoft.com/office/drawing/2014/main" val="1700444250"/>
+                      </a:ext>
+                    </a:extLst>
+                  </a:tr>
+                  <a:tr h="370840">
+                    <a:tc>
+                      <a:txBody>
+                        <a:bodyPr/>
+                        <a:lstStyle/>
+                        <a:p>
+                          <a:r>
+                            <a:rPr lang="en-US" dirty="0"/>
+                            <a:t>[15 min]</a:t>
+                          </a:r>
+                        </a:p>
+                      </a:txBody>
+                      <a:tcPr/>
+                    </a:tc>
+                    <a:tc>
+                      <a:txBody>
+                        <a:bodyPr/>
+                        <a:lstStyle/>
+                        <a:p>
+                          <a:r>
+                            <a:rPr lang="en-US" sz="1800" kern="1200" dirty="0">
+                              <a:solidFill>
+                                <a:schemeClr val="dk1"/>
+                              </a:solidFill>
+                              <a:effectLst/>
+                              <a:latin typeface="+mn-lt"/>
+                              <a:ea typeface="+mn-ea"/>
+                              <a:cs typeface="+mn-cs"/>
+                            </a:rPr>
+                            <a:t>(0) Introductions and administrivia </a:t>
+                          </a:r>
+                          <a:endParaRPr lang="en-US" dirty="0"/>
+                        </a:p>
+                      </a:txBody>
+                      <a:tcPr/>
+                    </a:tc>
+                    <a:tc>
+                      <a:txBody>
+                        <a:bodyPr/>
+                        <a:lstStyle/>
+                        <a:p>
+                          <a:r>
+                            <a:rPr lang="en-US" dirty="0" err="1"/>
+                            <a:t>Trikalinos</a:t>
+                          </a:r>
+                          <a:endParaRPr lang="en-US" dirty="0"/>
+                        </a:p>
+                      </a:txBody>
+                      <a:tcPr/>
+                    </a:tc>
+                    <a:extLst>
+                      <a:ext uri="{0D108BD9-81ED-4DB2-BD59-A6C34878D82A}">
+                        <a16:rowId xmlns:a16="http://schemas.microsoft.com/office/drawing/2014/main" val="2490995723"/>
+                      </a:ext>
+                    </a:extLst>
+                  </a:tr>
+                  <a:tr h="370840">
+                    <a:tc>
+                      <a:txBody>
+                        <a:bodyPr/>
+                        <a:lstStyle/>
+                        <a:p>
+                          <a:r>
+                            <a:rPr lang="en-US" dirty="0"/>
+                            <a:t>[25 min]</a:t>
+                          </a:r>
+                        </a:p>
+                      </a:txBody>
+                      <a:tcPr/>
+                    </a:tc>
+                    <a:tc>
+                      <a:txBody>
+                        <a:bodyPr/>
+                        <a:lstStyle/>
+                        <a:p>
+                          <a:r>
+                            <a:rPr lang="en-US" sz="1800" kern="1200" dirty="0">
+                              <a:solidFill>
+                                <a:schemeClr val="dk1"/>
+                              </a:solidFill>
+                              <a:effectLst/>
+                              <a:latin typeface="+mn-lt"/>
+                              <a:ea typeface="+mn-ea"/>
+                              <a:cs typeface="+mn-cs"/>
+                            </a:rPr>
+                            <a:t>(1) DES as a composition of point processes</a:t>
+                          </a:r>
+                        </a:p>
+                      </a:txBody>
+                      <a:tcPr/>
+                    </a:tc>
+                    <a:tc>
+                      <a:txBody>
+                        <a:bodyPr/>
+                        <a:lstStyle/>
+                        <a:p>
+                          <a:r>
+                            <a:rPr lang="en-US" dirty="0" err="1"/>
+                            <a:t>Alarid</a:t>
+                          </a:r>
+                          <a:r>
+                            <a:rPr lang="en-US" dirty="0"/>
+                            <a:t>-Escudero</a:t>
+                          </a:r>
+                        </a:p>
+                      </a:txBody>
+                      <a:tcPr/>
+                    </a:tc>
+                    <a:extLst>
+                      <a:ext uri="{0D108BD9-81ED-4DB2-BD59-A6C34878D82A}">
+                        <a16:rowId xmlns:a16="http://schemas.microsoft.com/office/drawing/2014/main" val="2065491183"/>
+                      </a:ext>
+                    </a:extLst>
+                  </a:tr>
+                  <a:tr h="370840">
+                    <a:tc>
+                      <a:txBody>
+                        <a:bodyPr/>
+                        <a:lstStyle/>
+                        <a:p>
+                          <a:r>
+                            <a:rPr lang="en-US" dirty="0"/>
+                            <a:t>[30 min]</a:t>
+                          </a:r>
+                        </a:p>
+                      </a:txBody>
+                      <a:tcPr/>
+                    </a:tc>
+                    <a:tc>
+                      <a:txBody>
+                        <a:bodyPr/>
+                        <a:lstStyle/>
+                        <a:p>
+                          <a:pPr marL="0" marR="0" lvl="0" indent="0" algn="l" defTabSz="914400" rtl="0" eaLnBrk="1" fontAlgn="auto" latinLnBrk="0" hangingPunct="1">
+                            <a:lnSpc>
+                              <a:spcPct val="100000"/>
+                            </a:lnSpc>
+                            <a:spcBef>
+                              <a:spcPts val="0"/>
+                            </a:spcBef>
+                            <a:spcAft>
+                              <a:spcPts val="0"/>
+                            </a:spcAft>
+                            <a:buClrTx/>
+                            <a:buSzTx/>
+                            <a:buFontTx/>
+                            <a:buNone/>
+                            <a:tabLst/>
+                            <a:defRPr/>
+                          </a:pPr>
+                          <a:r>
+                            <a:rPr lang="en-US" sz="1800" kern="1200" dirty="0">
+                              <a:solidFill>
+                                <a:schemeClr val="dk1"/>
+                              </a:solidFill>
+                              <a:effectLst/>
+                              <a:latin typeface="+mn-lt"/>
+                              <a:ea typeface="+mn-ea"/>
+                              <a:cs typeface="+mn-cs"/>
+                            </a:rPr>
+                            <a:t>(2) NHPPPs – key properties</a:t>
+                          </a:r>
+                        </a:p>
+                      </a:txBody>
+                      <a:tcPr/>
+                    </a:tc>
+                    <a:tc>
+                      <a:txBody>
+                        <a:bodyPr/>
+                        <a:lstStyle/>
+                        <a:p>
+                          <a:r>
+                            <a:rPr lang="en-US" dirty="0" err="1"/>
+                            <a:t>Trikalinos</a:t>
+                          </a:r>
+                          <a:endParaRPr lang="en-US" dirty="0"/>
+                        </a:p>
+                      </a:txBody>
+                      <a:tcPr/>
+                    </a:tc>
+                    <a:extLst>
+                      <a:ext uri="{0D108BD9-81ED-4DB2-BD59-A6C34878D82A}">
+                        <a16:rowId xmlns:a16="http://schemas.microsoft.com/office/drawing/2014/main" val="2757944147"/>
+                      </a:ext>
+                    </a:extLst>
+                  </a:tr>
+                  <a:tr h="370840">
+                    <a:tc>
+                      <a:txBody>
+                        <a:bodyPr/>
+                        <a:lstStyle/>
+                        <a:p>
+                          <a:r>
+                            <a:rPr lang="en-US" dirty="0"/>
+                            <a:t>[30 min]</a:t>
+                          </a:r>
+                        </a:p>
+                      </a:txBody>
+                      <a:tcPr/>
+                    </a:tc>
+                    <a:tc>
+                      <a:txBody>
+                        <a:bodyPr/>
+                        <a:lstStyle/>
+                        <a:p>
+                          <a:r>
+                            <a:rPr lang="en-US" sz="1800" kern="1200" dirty="0">
+                              <a:solidFill>
+                                <a:schemeClr val="dk1"/>
+                              </a:solidFill>
+                              <a:effectLst/>
+                              <a:latin typeface="+mn-lt"/>
+                              <a:ea typeface="+mn-ea"/>
+                              <a:cs typeface="+mn-cs"/>
+                            </a:rPr>
+                            <a:t>(3) Sampling from NHPPPs</a:t>
+                          </a:r>
+                          <a:endParaRPr lang="en-US" dirty="0"/>
+                        </a:p>
+                      </a:txBody>
+                      <a:tcPr/>
+                    </a:tc>
+                    <a:tc>
+                      <a:txBody>
+                        <a:bodyPr/>
+                        <a:lstStyle/>
+                        <a:p>
+                          <a:pPr marL="0" marR="0" lvl="0" indent="0" algn="l" defTabSz="914400" rtl="0" eaLnBrk="1" fontAlgn="auto" latinLnBrk="0" hangingPunct="1">
+                            <a:lnSpc>
+                              <a:spcPct val="100000"/>
+                            </a:lnSpc>
+                            <a:spcBef>
+                              <a:spcPts val="0"/>
+                            </a:spcBef>
+                            <a:spcAft>
+                              <a:spcPts val="0"/>
+                            </a:spcAft>
+                            <a:buClrTx/>
+                            <a:buSzTx/>
+                            <a:buFontTx/>
+                            <a:buNone/>
+                            <a:tabLst/>
+                            <a:defRPr/>
+                          </a:pPr>
+                          <a:r>
+                            <a:rPr lang="en-US" dirty="0"/>
+                            <a:t>Trikalinos</a:t>
+                          </a:r>
+                        </a:p>
+                      </a:txBody>
+                      <a:tcPr/>
+                    </a:tc>
+                    <a:extLst>
+                      <a:ext uri="{0D108BD9-81ED-4DB2-BD59-A6C34878D82A}">
+                        <a16:rowId xmlns:a16="http://schemas.microsoft.com/office/drawing/2014/main" val="1442363784"/>
+                      </a:ext>
+                    </a:extLst>
+                  </a:tr>
+                  <a:tr h="370840">
+                    <a:tc>
+                      <a:txBody>
+                        <a:bodyPr/>
+                        <a:lstStyle/>
+                        <a:p>
+                          <a:r>
+                            <a:rPr lang="en-US" dirty="0"/>
+                            <a:t>[15 min]</a:t>
+                          </a:r>
+                        </a:p>
+                      </a:txBody>
+                      <a:tcPr/>
+                    </a:tc>
+                    <a:tc>
+                      <a:txBody>
+                        <a:bodyPr/>
+                        <a:lstStyle/>
+                        <a:p>
+                          <a:pPr marL="0" marR="0" lvl="0" indent="0" algn="l" defTabSz="914400" rtl="0" eaLnBrk="1" fontAlgn="auto" latinLnBrk="0" hangingPunct="1">
+                            <a:lnSpc>
+                              <a:spcPct val="100000"/>
+                            </a:lnSpc>
+                            <a:spcBef>
+                              <a:spcPts val="0"/>
+                            </a:spcBef>
+                            <a:spcAft>
+                              <a:spcPts val="0"/>
+                            </a:spcAft>
+                            <a:buClrTx/>
+                            <a:buSzTx/>
+                            <a:buFontTx/>
+                            <a:buNone/>
+                            <a:tabLst/>
+                            <a:defRPr/>
+                          </a:pPr>
+                          <a:r>
+                            <a:rPr lang="en-US" b="1" dirty="0"/>
+                            <a:t>Break</a:t>
+                          </a:r>
+                        </a:p>
+                      </a:txBody>
+                      <a:tcPr/>
+                    </a:tc>
+                    <a:tc>
+                      <a:txBody>
+                        <a:bodyPr/>
+                        <a:lstStyle/>
+                        <a:p>
+                          <a:endParaRPr lang="en-US" dirty="0"/>
+                        </a:p>
+                      </a:txBody>
+                      <a:tcPr/>
+                    </a:tc>
+                    <a:extLst>
+                      <a:ext uri="{0D108BD9-81ED-4DB2-BD59-A6C34878D82A}">
+                        <a16:rowId xmlns:a16="http://schemas.microsoft.com/office/drawing/2014/main" val="1269228105"/>
+                      </a:ext>
+                    </a:extLst>
+                  </a:tr>
+                  <a:tr h="370840">
+                    <a:tc>
+                      <a:txBody>
+                        <a:bodyPr/>
+                        <a:lstStyle/>
+                        <a:p>
+                          <a:r>
+                            <a:rPr lang="en-US" dirty="0"/>
+                            <a:t>[80 min]</a:t>
+                          </a:r>
+                        </a:p>
+                      </a:txBody>
+                      <a:tcPr/>
+                    </a:tc>
+                    <a:tc>
+                      <a:txBody>
+                        <a:bodyPr/>
+                        <a:lstStyle/>
+                        <a:p>
+                          <a:r>
+                            <a:rPr lang="en-US" sz="1800" kern="1200" dirty="0">
+                              <a:solidFill>
+                                <a:schemeClr val="dk1"/>
+                              </a:solidFill>
+                              <a:effectLst/>
+                              <a:latin typeface="+mn-lt"/>
+                              <a:ea typeface="+mn-ea"/>
+                              <a:cs typeface="+mn-cs"/>
+                            </a:rPr>
+                            <a:t>(4) Working with code</a:t>
+                          </a:r>
+                        </a:p>
+                        <a:p>
+                          <a:r>
+                            <a:rPr lang="en-US" sz="1800" kern="1200" dirty="0">
+                              <a:solidFill>
+                                <a:schemeClr val="dk1"/>
+                              </a:solidFill>
+                              <a:effectLst/>
+                              <a:latin typeface="+mn-lt"/>
+                              <a:ea typeface="+mn-ea"/>
+                              <a:cs typeface="+mn-cs"/>
+                            </a:rPr>
+                            <a:t>-- Base </a:t>
+                          </a:r>
+                          <a:r>
+                            <a:rPr lang="en-US" sz="1800" kern="1200" dirty="0">
+                              <a:solidFill>
+                                <a:schemeClr val="dk1"/>
+                              </a:solidFill>
+                              <a:effectLst/>
+                              <a:latin typeface="Courier New" panose="02070309020205020404" pitchFamily="49" charset="0"/>
+                              <a:ea typeface="+mn-ea"/>
+                              <a:cs typeface="Courier New" panose="02070309020205020404" pitchFamily="49" charset="0"/>
+                            </a:rPr>
+                            <a:t>R</a:t>
+                          </a:r>
+                          <a:r>
+                            <a:rPr lang="en-US" sz="1800" kern="1200" dirty="0">
+                              <a:solidFill>
+                                <a:schemeClr val="dk1"/>
+                              </a:solidFill>
+                              <a:effectLst/>
+                              <a:latin typeface="+mn-lt"/>
+                              <a:ea typeface="+mn-ea"/>
+                              <a:cs typeface="+mn-cs"/>
+                            </a:rPr>
+                            <a:t> vs </a:t>
+                          </a:r>
+                          <a:r>
+                            <a:rPr lang="en-US" sz="1800" kern="1200" dirty="0" err="1">
+                              <a:solidFill>
+                                <a:schemeClr val="dk1"/>
+                              </a:solidFill>
+                              <a:effectLst/>
+                              <a:latin typeface="Courier New" panose="02070309020205020404" pitchFamily="49" charset="0"/>
+                              <a:ea typeface="+mn-ea"/>
+                              <a:cs typeface="Courier New" panose="02070309020205020404" pitchFamily="49" charset="0"/>
+                            </a:rPr>
+                            <a:t>nhppp</a:t>
+                          </a:r>
+                          <a:r>
+                            <a:rPr lang="en-US" sz="1800" kern="1200" dirty="0">
+                              <a:solidFill>
+                                <a:schemeClr val="dk1"/>
+                              </a:solidFill>
+                              <a:effectLst/>
+                              <a:latin typeface="+mn-lt"/>
+                              <a:ea typeface="+mn-ea"/>
+                              <a:cs typeface="+mn-cs"/>
+                            </a:rPr>
+                            <a:t>:  Simulate first vs all events in </a:t>
+                          </a:r>
+                          <a14:m>
+                            <m:oMath xmlns:m="http://schemas.openxmlformats.org/officeDocument/2006/math">
+                              <m:r>
+                                <a:rPr lang="en-US" sz="1800" b="0" i="1" kern="1200" smtClean="0">
+                                  <a:solidFill>
+                                    <a:schemeClr val="dk1"/>
+                                  </a:solidFill>
+                                  <a:effectLst/>
+                                  <a:latin typeface="Cambria Math" panose="02040503050406030204" pitchFamily="18" charset="0"/>
+                                  <a:ea typeface="+mn-ea"/>
+                                  <a:cs typeface="+mn-cs"/>
+                                </a:rPr>
+                                <m:t>(</m:t>
+                              </m:r>
+                              <m:r>
+                                <m:rPr>
+                                  <m:sty m:val="p"/>
+                                </m:rPr>
+                                <a:rPr lang="en-US" sz="1800" b="0" i="1" kern="1200" smtClean="0">
+                                  <a:solidFill>
+                                    <a:schemeClr val="dk1"/>
+                                  </a:solidFill>
+                                  <a:effectLst/>
+                                  <a:latin typeface="Cambria Math" panose="02040503050406030204" pitchFamily="18" charset="0"/>
+                                  <a:ea typeface="+mn-ea"/>
+                                  <a:cs typeface="+mn-cs"/>
+                                </a:rPr>
+                                <m:t>a</m:t>
+                              </m:r>
+                              <m:r>
+                                <a:rPr lang="en-US" sz="1800" b="0" i="1" kern="1200" smtClean="0">
+                                  <a:solidFill>
+                                    <a:schemeClr val="dk1"/>
+                                  </a:solidFill>
+                                  <a:effectLst/>
+                                  <a:latin typeface="Cambria Math" panose="02040503050406030204" pitchFamily="18" charset="0"/>
+                                  <a:ea typeface="+mn-ea"/>
+                                  <a:cs typeface="+mn-cs"/>
+                                </a:rPr>
+                                <m:t>,</m:t>
+                              </m:r>
+                              <m:r>
+                                <m:rPr>
+                                  <m:sty m:val="p"/>
+                                </m:rPr>
+                                <a:rPr lang="en-US" sz="1800" b="0" i="1" kern="1200" smtClean="0">
+                                  <a:solidFill>
+                                    <a:schemeClr val="dk1"/>
+                                  </a:solidFill>
+                                  <a:effectLst/>
+                                  <a:latin typeface="Cambria Math" panose="02040503050406030204" pitchFamily="18" charset="0"/>
+                                  <a:ea typeface="+mn-ea"/>
+                                  <a:cs typeface="+mn-cs"/>
+                                </a:rPr>
+                                <m:t>b</m:t>
+                              </m:r>
+                              <m:r>
+                                <a:rPr lang="en-US" sz="1800" b="0" i="1" kern="1200" smtClean="0">
+                                  <a:solidFill>
+                                    <a:schemeClr val="dk1"/>
+                                  </a:solidFill>
+                                  <a:effectLst/>
+                                  <a:latin typeface="Cambria Math" panose="02040503050406030204" pitchFamily="18" charset="0"/>
+                                  <a:ea typeface="+mn-ea"/>
+                                  <a:cs typeface="+mn-cs"/>
+                                </a:rPr>
+                                <m:t>]</m:t>
+                              </m:r>
+                            </m:oMath>
+                          </a14:m>
+                          <a:endParaRPr lang="en-US" sz="1800" kern="1200" dirty="0">
+                            <a:solidFill>
+                              <a:schemeClr val="dk1"/>
+                            </a:solidFill>
+                            <a:effectLst/>
+                            <a:latin typeface="+mn-lt"/>
+                            <a:ea typeface="+mn-ea"/>
+                            <a:cs typeface="+mn-cs"/>
+                          </a:endParaRPr>
+                        </a:p>
+                        <a:p>
+                          <a:r>
+                            <a:rPr lang="en-US" sz="1800" kern="1200" dirty="0">
+                              <a:solidFill>
+                                <a:schemeClr val="dk1"/>
+                              </a:solidFill>
+                              <a:effectLst/>
+                              <a:latin typeface="+mn-lt"/>
+                              <a:ea typeface="+mn-ea"/>
+                              <a:cs typeface="+mn-cs"/>
+                            </a:rPr>
+                            <a:t>-- Packaging a simple cancer DES </a:t>
+                          </a:r>
+                        </a:p>
+                        <a:p>
+                          <a:r>
+                            <a:rPr lang="en-US" sz="1800" kern="1200" dirty="0">
+                              <a:solidFill>
+                                <a:schemeClr val="dk1"/>
+                              </a:solidFill>
+                              <a:effectLst/>
+                              <a:latin typeface="+mn-lt"/>
+                              <a:ea typeface="+mn-ea"/>
+                              <a:cs typeface="+mn-cs"/>
+                            </a:rPr>
+                            <a:t>-- The vectorized case </a:t>
+                          </a:r>
+                        </a:p>
+                      </a:txBody>
+                      <a:tcPr/>
+                    </a:tc>
+                    <a:tc>
+                      <a:txBody>
+                        <a:bodyPr/>
+                        <a:lstStyle/>
+                        <a:p>
+                          <a:r>
+                            <a:rPr lang="en-US" dirty="0"/>
+                            <a:t>[All]</a:t>
+                          </a:r>
+                        </a:p>
+                        <a:p>
+                          <a:r>
+                            <a:rPr lang="en-US" dirty="0"/>
+                            <a:t>Trikalinos</a:t>
+                          </a:r>
+                        </a:p>
+                        <a:p>
+                          <a:r>
+                            <a:rPr lang="en-US" dirty="0"/>
+                            <a:t>Sereda</a:t>
+                          </a:r>
+                        </a:p>
+                        <a:p>
+                          <a:pPr marL="0" marR="0" lvl="0" indent="0" algn="l" defTabSz="914400" rtl="0" eaLnBrk="1" fontAlgn="auto" latinLnBrk="0" hangingPunct="1">
+                            <a:lnSpc>
+                              <a:spcPct val="100000"/>
+                            </a:lnSpc>
+                            <a:spcBef>
+                              <a:spcPts val="0"/>
+                            </a:spcBef>
+                            <a:spcAft>
+                              <a:spcPts val="0"/>
+                            </a:spcAft>
+                            <a:buClrTx/>
+                            <a:buSzTx/>
+                            <a:buFontTx/>
+                            <a:buNone/>
+                            <a:tabLst/>
+                            <a:defRPr/>
+                          </a:pPr>
+                          <a:r>
+                            <a:rPr lang="en-US" dirty="0"/>
+                            <a:t>Sereda</a:t>
+                          </a:r>
+                        </a:p>
+                      </a:txBody>
+                      <a:tcPr/>
+                    </a:tc>
+                    <a:extLst>
+                      <a:ext uri="{0D108BD9-81ED-4DB2-BD59-A6C34878D82A}">
+                        <a16:rowId xmlns:a16="http://schemas.microsoft.com/office/drawing/2014/main" val="1448491104"/>
+                      </a:ext>
+                    </a:extLst>
+                  </a:tr>
+                  <a:tr h="370840">
+                    <a:tc>
+                      <a:txBody>
+                        <a:bodyPr/>
+                        <a:lstStyle/>
+                        <a:p>
+                          <a:r>
+                            <a:rPr lang="en-US" dirty="0"/>
+                            <a:t>[5 min]</a:t>
+                          </a:r>
+                        </a:p>
+                      </a:txBody>
+                      <a:tcPr/>
+                    </a:tc>
+                    <a:tc>
+                      <a:txBody>
+                        <a:bodyPr/>
+                        <a:lstStyle/>
+                        <a:p>
+                          <a:pPr marL="0" marR="0" lvl="0" indent="0" algn="l" defTabSz="914400" rtl="0" eaLnBrk="1" fontAlgn="auto" latinLnBrk="0" hangingPunct="1">
+                            <a:lnSpc>
+                              <a:spcPct val="100000"/>
+                            </a:lnSpc>
+                            <a:spcBef>
+                              <a:spcPts val="0"/>
+                            </a:spcBef>
+                            <a:spcAft>
+                              <a:spcPts val="0"/>
+                            </a:spcAft>
+                            <a:buClrTx/>
+                            <a:buSzTx/>
+                            <a:buFontTx/>
+                            <a:buNone/>
+                            <a:tabLst/>
+                            <a:defRPr/>
+                          </a:pPr>
+                          <a:r>
+                            <a:rPr lang="en-US" sz="1800" kern="1200" dirty="0">
+                              <a:solidFill>
+                                <a:schemeClr val="dk1"/>
+                              </a:solidFill>
+                              <a:effectLst/>
+                              <a:latin typeface="+mn-lt"/>
+                              <a:ea typeface="+mn-ea"/>
+                              <a:cs typeface="+mn-cs"/>
+                            </a:rPr>
+                            <a:t>(5) Advanced Topic Teaser on self-excitatory processes: point processes that are not NHPPPs and when you may need them</a:t>
+                          </a:r>
+                        </a:p>
+                      </a:txBody>
+                      <a:tcPr/>
+                    </a:tc>
+                    <a:tc>
+                      <a:txBody>
+                        <a:bodyPr/>
+                        <a:lstStyle/>
+                        <a:p>
+                          <a:r>
+                            <a:rPr lang="en-US" dirty="0"/>
+                            <a:t>Trikalinos</a:t>
+                          </a:r>
+                        </a:p>
+                      </a:txBody>
+                      <a:tcPr/>
+                    </a:tc>
+                    <a:extLst>
+                      <a:ext uri="{0D108BD9-81ED-4DB2-BD59-A6C34878D82A}">
+                        <a16:rowId xmlns:a16="http://schemas.microsoft.com/office/drawing/2014/main" val="3766472740"/>
+                      </a:ext>
+                    </a:extLst>
+                  </a:tr>
+                  <a:tr h="370840">
+                    <a:tc>
+                      <a:txBody>
+                        <a:bodyPr/>
+                        <a:lstStyle/>
+                        <a:p>
+                          <a:r>
+                            <a:rPr lang="en-US" dirty="0"/>
+                            <a:t>[15 min]</a:t>
+                          </a:r>
+                        </a:p>
+                      </a:txBody>
+                      <a:tcPr/>
+                    </a:tc>
+                    <a:tc>
+                      <a:txBody>
+                        <a:bodyPr/>
+                        <a:lstStyle/>
+                        <a:p>
+                          <a:r>
+                            <a:rPr lang="en-US" dirty="0"/>
+                            <a:t>General Q &amp; A</a:t>
+                          </a:r>
+                        </a:p>
+                      </a:txBody>
+                      <a:tcPr/>
+                    </a:tc>
+                    <a:tc>
+                      <a:txBody>
+                        <a:bodyPr/>
+                        <a:lstStyle/>
+                        <a:p>
+                          <a:r>
+                            <a:rPr lang="en-US" dirty="0"/>
+                            <a:t>All</a:t>
+                          </a:r>
+                        </a:p>
+                      </a:txBody>
+                      <a:tcPr/>
+                    </a:tc>
+                    <a:extLst>
+                      <a:ext uri="{0D108BD9-81ED-4DB2-BD59-A6C34878D82A}">
+                        <a16:rowId xmlns:a16="http://schemas.microsoft.com/office/drawing/2014/main" val="3034331301"/>
+                      </a:ext>
+                    </a:extLst>
+                  </a:tr>
+                </a:tbl>
+              </a:graphicData>
+            </a:graphic>
+          </p:graphicFrame>
+        </mc:Choice>
+        <mc:Fallback>
+          <p:graphicFrame>
+            <p:nvGraphicFramePr>
+              <p:cNvPr id="7" name="Content Placeholder 3">
+                <a:extLst>
+                  <a:ext uri="{FF2B5EF4-FFF2-40B4-BE49-F238E27FC236}">
+                    <a16:creationId xmlns:a16="http://schemas.microsoft.com/office/drawing/2014/main" id="{3D80CB97-9DD4-F667-6F4E-6D43FF3659EC}"/>
+                  </a:ext>
+                </a:extLst>
+              </p:cNvPr>
+              <p:cNvGraphicFramePr>
+                <a:graphicFrameLocks/>
+              </p:cNvGraphicFramePr>
+              <p:nvPr>
+                <p:extLst>
+                  <p:ext uri="{D42A27DB-BD31-4B8C-83A1-F6EECF244321}">
+                    <p14:modId xmlns:p14="http://schemas.microsoft.com/office/powerpoint/2010/main" val="260976388"/>
+                  </p:ext>
+                </p:extLst>
+              </p:nvPr>
+            </p:nvGraphicFramePr>
+            <p:xfrm>
+              <a:off x="1208690" y="942340"/>
+              <a:ext cx="10720551" cy="4699000"/>
+            </p:xfrm>
+            <a:graphic>
+              <a:graphicData uri="http://schemas.openxmlformats.org/drawingml/2006/table">
+                <a:tbl>
+                  <a:tblPr firstRow="1" bandRow="1">
+                    <a:tableStyleId>{21E4AEA4-8DFA-4A89-87EB-49C32662AFE0}</a:tableStyleId>
+                  </a:tblPr>
+                  <a:tblGrid>
+                    <a:gridCol w="1717110">
+                      <a:extLst>
+                        <a:ext uri="{9D8B030D-6E8A-4147-A177-3AD203B41FA5}">
+                          <a16:colId xmlns:a16="http://schemas.microsoft.com/office/drawing/2014/main" val="4182014441"/>
+                        </a:ext>
+                      </a:extLst>
+                    </a:gridCol>
+                    <a:gridCol w="5976462">
+                      <a:extLst>
+                        <a:ext uri="{9D8B030D-6E8A-4147-A177-3AD203B41FA5}">
+                          <a16:colId xmlns:a16="http://schemas.microsoft.com/office/drawing/2014/main" val="906180283"/>
+                        </a:ext>
+                      </a:extLst>
+                    </a:gridCol>
+                    <a:gridCol w="3026979">
+                      <a:extLst>
+                        <a:ext uri="{9D8B030D-6E8A-4147-A177-3AD203B41FA5}">
+                          <a16:colId xmlns:a16="http://schemas.microsoft.com/office/drawing/2014/main" val="2769721792"/>
+                        </a:ext>
+                      </a:extLst>
+                    </a:gridCol>
+                  </a:tblGrid>
+                  <a:tr h="370840">
+                    <a:tc>
+                      <a:txBody>
+                        <a:bodyPr/>
+                        <a:lstStyle/>
+                        <a:p>
+                          <a:r>
+                            <a:rPr lang="en-US" dirty="0"/>
+                            <a:t>Time</a:t>
+                          </a:r>
+                        </a:p>
+                      </a:txBody>
+                      <a:tcPr/>
+                    </a:tc>
+                    <a:tc>
+                      <a:txBody>
+                        <a:bodyPr/>
+                        <a:lstStyle/>
+                        <a:p>
+                          <a:r>
+                            <a:rPr lang="en-US" dirty="0"/>
+                            <a:t>Description</a:t>
+                          </a:r>
+                        </a:p>
+                      </a:txBody>
+                      <a:tcPr/>
+                    </a:tc>
+                    <a:tc>
+                      <a:txBody>
+                        <a:bodyPr/>
+                        <a:lstStyle/>
+                        <a:p>
+                          <a:r>
+                            <a:rPr lang="en-US" dirty="0"/>
+                            <a:t>Discussant</a:t>
+                          </a:r>
+                        </a:p>
+                      </a:txBody>
+                      <a:tcPr/>
+                    </a:tc>
+                    <a:extLst>
+                      <a:ext uri="{0D108BD9-81ED-4DB2-BD59-A6C34878D82A}">
+                        <a16:rowId xmlns:a16="http://schemas.microsoft.com/office/drawing/2014/main" val="1700444250"/>
+                      </a:ext>
+                    </a:extLst>
+                  </a:tr>
+                  <a:tr h="370840">
+                    <a:tc>
+                      <a:txBody>
+                        <a:bodyPr/>
+                        <a:lstStyle/>
+                        <a:p>
+                          <a:r>
+                            <a:rPr lang="en-US" dirty="0"/>
+                            <a:t>[15 min]</a:t>
+                          </a:r>
+                        </a:p>
+                      </a:txBody>
+                      <a:tcPr/>
+                    </a:tc>
+                    <a:tc>
+                      <a:txBody>
+                        <a:bodyPr/>
+                        <a:lstStyle/>
+                        <a:p>
+                          <a:r>
+                            <a:rPr lang="en-US" sz="1800" kern="1200" dirty="0">
+                              <a:solidFill>
+                                <a:schemeClr val="dk1"/>
+                              </a:solidFill>
+                              <a:effectLst/>
+                              <a:latin typeface="+mn-lt"/>
+                              <a:ea typeface="+mn-ea"/>
+                              <a:cs typeface="+mn-cs"/>
+                            </a:rPr>
+                            <a:t>(0) Introductions and administrivia </a:t>
+                          </a:r>
+                          <a:endParaRPr lang="en-US" dirty="0"/>
+                        </a:p>
+                      </a:txBody>
+                      <a:tcPr/>
+                    </a:tc>
+                    <a:tc>
+                      <a:txBody>
+                        <a:bodyPr/>
+                        <a:lstStyle/>
+                        <a:p>
+                          <a:r>
+                            <a:rPr lang="en-US" dirty="0" err="1"/>
+                            <a:t>Trikalinos</a:t>
+                          </a:r>
+                          <a:endParaRPr lang="en-US" dirty="0"/>
+                        </a:p>
+                      </a:txBody>
+                      <a:tcPr/>
+                    </a:tc>
+                    <a:extLst>
+                      <a:ext uri="{0D108BD9-81ED-4DB2-BD59-A6C34878D82A}">
+                        <a16:rowId xmlns:a16="http://schemas.microsoft.com/office/drawing/2014/main" val="2490995723"/>
+                      </a:ext>
+                    </a:extLst>
+                  </a:tr>
+                  <a:tr h="370840">
+                    <a:tc>
+                      <a:txBody>
+                        <a:bodyPr/>
+                        <a:lstStyle/>
+                        <a:p>
+                          <a:r>
+                            <a:rPr lang="en-US" dirty="0"/>
+                            <a:t>[25 min]</a:t>
+                          </a:r>
+                        </a:p>
+                      </a:txBody>
+                      <a:tcPr/>
+                    </a:tc>
+                    <a:tc>
+                      <a:txBody>
+                        <a:bodyPr/>
+                        <a:lstStyle/>
+                        <a:p>
+                          <a:r>
+                            <a:rPr lang="en-US" sz="1800" kern="1200" dirty="0">
+                              <a:solidFill>
+                                <a:schemeClr val="dk1"/>
+                              </a:solidFill>
+                              <a:effectLst/>
+                              <a:latin typeface="+mn-lt"/>
+                              <a:ea typeface="+mn-ea"/>
+                              <a:cs typeface="+mn-cs"/>
+                            </a:rPr>
+                            <a:t>(1) DES as a composition of point processes</a:t>
+                          </a:r>
+                        </a:p>
+                      </a:txBody>
+                      <a:tcPr/>
+                    </a:tc>
+                    <a:tc>
+                      <a:txBody>
+                        <a:bodyPr/>
+                        <a:lstStyle/>
+                        <a:p>
+                          <a:r>
+                            <a:rPr lang="en-US" dirty="0" err="1"/>
+                            <a:t>Alarid</a:t>
+                          </a:r>
+                          <a:r>
+                            <a:rPr lang="en-US" dirty="0"/>
+                            <a:t>-Escudero</a:t>
+                          </a:r>
+                        </a:p>
+                      </a:txBody>
+                      <a:tcPr/>
+                    </a:tc>
+                    <a:extLst>
+                      <a:ext uri="{0D108BD9-81ED-4DB2-BD59-A6C34878D82A}">
+                        <a16:rowId xmlns:a16="http://schemas.microsoft.com/office/drawing/2014/main" val="2065491183"/>
+                      </a:ext>
+                    </a:extLst>
+                  </a:tr>
+                  <a:tr h="370840">
+                    <a:tc>
+                      <a:txBody>
+                        <a:bodyPr/>
+                        <a:lstStyle/>
+                        <a:p>
+                          <a:r>
+                            <a:rPr lang="en-US" dirty="0"/>
+                            <a:t>[30 min]</a:t>
+                          </a:r>
+                        </a:p>
+                      </a:txBody>
+                      <a:tcPr/>
+                    </a:tc>
+                    <a:tc>
+                      <a:txBody>
+                        <a:bodyPr/>
+                        <a:lstStyle/>
+                        <a:p>
+                          <a:pPr marL="0" marR="0" lvl="0" indent="0" algn="l" defTabSz="914400" rtl="0" eaLnBrk="1" fontAlgn="auto" latinLnBrk="0" hangingPunct="1">
+                            <a:lnSpc>
+                              <a:spcPct val="100000"/>
+                            </a:lnSpc>
+                            <a:spcBef>
+                              <a:spcPts val="0"/>
+                            </a:spcBef>
+                            <a:spcAft>
+                              <a:spcPts val="0"/>
+                            </a:spcAft>
+                            <a:buClrTx/>
+                            <a:buSzTx/>
+                            <a:buFontTx/>
+                            <a:buNone/>
+                            <a:tabLst/>
+                            <a:defRPr/>
+                          </a:pPr>
+                          <a:r>
+                            <a:rPr lang="en-US" sz="1800" kern="1200" dirty="0">
+                              <a:solidFill>
+                                <a:schemeClr val="dk1"/>
+                              </a:solidFill>
+                              <a:effectLst/>
+                              <a:latin typeface="+mn-lt"/>
+                              <a:ea typeface="+mn-ea"/>
+                              <a:cs typeface="+mn-cs"/>
+                            </a:rPr>
+                            <a:t>(2) NHPPPs – key properties</a:t>
+                          </a:r>
+                        </a:p>
+                      </a:txBody>
+                      <a:tcPr/>
+                    </a:tc>
+                    <a:tc>
+                      <a:txBody>
+                        <a:bodyPr/>
+                        <a:lstStyle/>
+                        <a:p>
+                          <a:r>
+                            <a:rPr lang="en-US" dirty="0" err="1"/>
+                            <a:t>Trikalinos</a:t>
+                          </a:r>
+                          <a:endParaRPr lang="en-US" dirty="0"/>
+                        </a:p>
+                      </a:txBody>
+                      <a:tcPr/>
+                    </a:tc>
+                    <a:extLst>
+                      <a:ext uri="{0D108BD9-81ED-4DB2-BD59-A6C34878D82A}">
+                        <a16:rowId xmlns:a16="http://schemas.microsoft.com/office/drawing/2014/main" val="2757944147"/>
+                      </a:ext>
+                    </a:extLst>
+                  </a:tr>
+                  <a:tr h="370840">
+                    <a:tc>
+                      <a:txBody>
+                        <a:bodyPr/>
+                        <a:lstStyle/>
+                        <a:p>
+                          <a:r>
+                            <a:rPr lang="en-US" dirty="0"/>
+                            <a:t>[30 min]</a:t>
+                          </a:r>
+                        </a:p>
+                      </a:txBody>
+                      <a:tcPr/>
+                    </a:tc>
+                    <a:tc>
+                      <a:txBody>
+                        <a:bodyPr/>
+                        <a:lstStyle/>
+                        <a:p>
+                          <a:r>
+                            <a:rPr lang="en-US" sz="1800" kern="1200" dirty="0">
+                              <a:solidFill>
+                                <a:schemeClr val="dk1"/>
+                              </a:solidFill>
+                              <a:effectLst/>
+                              <a:latin typeface="+mn-lt"/>
+                              <a:ea typeface="+mn-ea"/>
+                              <a:cs typeface="+mn-cs"/>
+                            </a:rPr>
+                            <a:t>(3) Sampling from NHPPPs</a:t>
+                          </a:r>
+                          <a:endParaRPr lang="en-US" dirty="0"/>
+                        </a:p>
+                      </a:txBody>
+                      <a:tcPr/>
+                    </a:tc>
+                    <a:tc>
+                      <a:txBody>
+                        <a:bodyPr/>
+                        <a:lstStyle/>
+                        <a:p>
+                          <a:pPr marL="0" marR="0" lvl="0" indent="0" algn="l" defTabSz="914400" rtl="0" eaLnBrk="1" fontAlgn="auto" latinLnBrk="0" hangingPunct="1">
+                            <a:lnSpc>
+                              <a:spcPct val="100000"/>
+                            </a:lnSpc>
+                            <a:spcBef>
+                              <a:spcPts val="0"/>
+                            </a:spcBef>
+                            <a:spcAft>
+                              <a:spcPts val="0"/>
+                            </a:spcAft>
+                            <a:buClrTx/>
+                            <a:buSzTx/>
+                            <a:buFontTx/>
+                            <a:buNone/>
+                            <a:tabLst/>
+                            <a:defRPr/>
+                          </a:pPr>
+                          <a:r>
+                            <a:rPr lang="en-US" dirty="0"/>
+                            <a:t>Trikalinos</a:t>
+                          </a:r>
+                        </a:p>
+                      </a:txBody>
+                      <a:tcPr/>
+                    </a:tc>
+                    <a:extLst>
+                      <a:ext uri="{0D108BD9-81ED-4DB2-BD59-A6C34878D82A}">
+                        <a16:rowId xmlns:a16="http://schemas.microsoft.com/office/drawing/2014/main" val="1442363784"/>
+                      </a:ext>
+                    </a:extLst>
+                  </a:tr>
+                  <a:tr h="370840">
+                    <a:tc>
+                      <a:txBody>
+                        <a:bodyPr/>
+                        <a:lstStyle/>
+                        <a:p>
+                          <a:r>
+                            <a:rPr lang="en-US" dirty="0"/>
+                            <a:t>[15 min]</a:t>
+                          </a:r>
+                        </a:p>
+                      </a:txBody>
+                      <a:tcPr/>
+                    </a:tc>
+                    <a:tc>
+                      <a:txBody>
+                        <a:bodyPr/>
+                        <a:lstStyle/>
+                        <a:p>
+                          <a:pPr marL="0" marR="0" lvl="0" indent="0" algn="l" defTabSz="914400" rtl="0" eaLnBrk="1" fontAlgn="auto" latinLnBrk="0" hangingPunct="1">
+                            <a:lnSpc>
+                              <a:spcPct val="100000"/>
+                            </a:lnSpc>
+                            <a:spcBef>
+                              <a:spcPts val="0"/>
+                            </a:spcBef>
+                            <a:spcAft>
+                              <a:spcPts val="0"/>
+                            </a:spcAft>
+                            <a:buClrTx/>
+                            <a:buSzTx/>
+                            <a:buFontTx/>
+                            <a:buNone/>
+                            <a:tabLst/>
+                            <a:defRPr/>
+                          </a:pPr>
+                          <a:r>
+                            <a:rPr lang="en-US" b="1" dirty="0"/>
+                            <a:t>Break</a:t>
+                          </a:r>
+                        </a:p>
+                      </a:txBody>
+                      <a:tcPr/>
+                    </a:tc>
+                    <a:tc>
+                      <a:txBody>
+                        <a:bodyPr/>
+                        <a:lstStyle/>
+                        <a:p>
+                          <a:endParaRPr lang="en-US" dirty="0"/>
+                        </a:p>
+                      </a:txBody>
+                      <a:tcPr/>
+                    </a:tc>
+                    <a:extLst>
+                      <a:ext uri="{0D108BD9-81ED-4DB2-BD59-A6C34878D82A}">
+                        <a16:rowId xmlns:a16="http://schemas.microsoft.com/office/drawing/2014/main" val="1269228105"/>
+                      </a:ext>
+                    </a:extLst>
+                  </a:tr>
+                  <a:tr h="1188720">
+                    <a:tc>
+                      <a:txBody>
+                        <a:bodyPr/>
+                        <a:lstStyle/>
+                        <a:p>
+                          <a:r>
+                            <a:rPr lang="en-US" dirty="0"/>
+                            <a:t>[80 min]</a:t>
+                          </a:r>
+                        </a:p>
+                      </a:txBody>
+                      <a:tcPr/>
+                    </a:tc>
+                    <a:tc>
+                      <a:txBody>
+                        <a:bodyPr/>
+                        <a:lstStyle/>
+                        <a:p>
+                          <a:endParaRPr lang="en-US"/>
+                        </a:p>
+                      </a:txBody>
+                      <a:tcPr>
+                        <a:blipFill>
+                          <a:blip r:embed="rId3"/>
+                          <a:stretch>
+                            <a:fillRect l="-28875" t="-189362" r="-51168" b="-114894"/>
+                          </a:stretch>
+                        </a:blipFill>
+                      </a:tcPr>
+                    </a:tc>
+                    <a:tc>
+                      <a:txBody>
+                        <a:bodyPr/>
+                        <a:lstStyle/>
+                        <a:p>
+                          <a:r>
+                            <a:rPr lang="en-US" dirty="0"/>
+                            <a:t>[All]</a:t>
+                          </a:r>
+                        </a:p>
+                        <a:p>
+                          <a:r>
+                            <a:rPr lang="en-US" dirty="0"/>
+                            <a:t>Trikalinos</a:t>
+                          </a:r>
+                        </a:p>
+                        <a:p>
+                          <a:r>
+                            <a:rPr lang="en-US" dirty="0"/>
+                            <a:t>Sereda</a:t>
+                          </a:r>
+                        </a:p>
+                        <a:p>
+                          <a:pPr marL="0" marR="0" lvl="0" indent="0" algn="l" defTabSz="914400" rtl="0" eaLnBrk="1" fontAlgn="auto" latinLnBrk="0" hangingPunct="1">
+                            <a:lnSpc>
+                              <a:spcPct val="100000"/>
+                            </a:lnSpc>
+                            <a:spcBef>
+                              <a:spcPts val="0"/>
+                            </a:spcBef>
+                            <a:spcAft>
+                              <a:spcPts val="0"/>
+                            </a:spcAft>
+                            <a:buClrTx/>
+                            <a:buSzTx/>
+                            <a:buFontTx/>
+                            <a:buNone/>
+                            <a:tabLst/>
+                            <a:defRPr/>
+                          </a:pPr>
+                          <a:r>
+                            <a:rPr lang="en-US" dirty="0"/>
+                            <a:t>Sereda</a:t>
+                          </a:r>
+                        </a:p>
+                      </a:txBody>
+                      <a:tcPr/>
+                    </a:tc>
+                    <a:extLst>
+                      <a:ext uri="{0D108BD9-81ED-4DB2-BD59-A6C34878D82A}">
+                        <a16:rowId xmlns:a16="http://schemas.microsoft.com/office/drawing/2014/main" val="1448491104"/>
+                      </a:ext>
+                    </a:extLst>
+                  </a:tr>
+                  <a:tr h="914400">
+                    <a:tc>
+                      <a:txBody>
+                        <a:bodyPr/>
+                        <a:lstStyle/>
+                        <a:p>
+                          <a:r>
+                            <a:rPr lang="en-US" dirty="0"/>
+                            <a:t>[5 min]</a:t>
+                          </a:r>
+                        </a:p>
+                      </a:txBody>
+                      <a:tcPr/>
+                    </a:tc>
+                    <a:tc>
+                      <a:txBody>
+                        <a:bodyPr/>
+                        <a:lstStyle/>
+                        <a:p>
+                          <a:pPr marL="0" marR="0" lvl="0" indent="0" algn="l" defTabSz="914400" rtl="0" eaLnBrk="1" fontAlgn="auto" latinLnBrk="0" hangingPunct="1">
+                            <a:lnSpc>
+                              <a:spcPct val="100000"/>
+                            </a:lnSpc>
+                            <a:spcBef>
+                              <a:spcPts val="0"/>
+                            </a:spcBef>
+                            <a:spcAft>
+                              <a:spcPts val="0"/>
+                            </a:spcAft>
+                            <a:buClrTx/>
+                            <a:buSzTx/>
+                            <a:buFontTx/>
+                            <a:buNone/>
+                            <a:tabLst/>
+                            <a:defRPr/>
+                          </a:pPr>
+                          <a:r>
+                            <a:rPr lang="en-US" sz="1800" kern="1200" dirty="0">
+                              <a:solidFill>
+                                <a:schemeClr val="dk1"/>
+                              </a:solidFill>
+                              <a:effectLst/>
+                              <a:latin typeface="+mn-lt"/>
+                              <a:ea typeface="+mn-ea"/>
+                              <a:cs typeface="+mn-cs"/>
+                            </a:rPr>
+                            <a:t>(5) Advanced Topic Teaser on self-excitatory processes: point processes that are not NHPPPs and when you may need them</a:t>
+                          </a:r>
+                        </a:p>
+                      </a:txBody>
+                      <a:tcPr/>
+                    </a:tc>
+                    <a:tc>
+                      <a:txBody>
+                        <a:bodyPr/>
+                        <a:lstStyle/>
+                        <a:p>
+                          <a:r>
+                            <a:rPr lang="en-US" dirty="0"/>
+                            <a:t>Trikalinos</a:t>
+                          </a:r>
+                        </a:p>
+                      </a:txBody>
+                      <a:tcPr/>
+                    </a:tc>
+                    <a:extLst>
+                      <a:ext uri="{0D108BD9-81ED-4DB2-BD59-A6C34878D82A}">
+                        <a16:rowId xmlns:a16="http://schemas.microsoft.com/office/drawing/2014/main" val="3766472740"/>
+                      </a:ext>
+                    </a:extLst>
+                  </a:tr>
+                  <a:tr h="370840">
+                    <a:tc>
+                      <a:txBody>
+                        <a:bodyPr/>
+                        <a:lstStyle/>
+                        <a:p>
+                          <a:r>
+                            <a:rPr lang="en-US" dirty="0"/>
+                            <a:t>[15 min]</a:t>
+                          </a:r>
+                        </a:p>
+                      </a:txBody>
+                      <a:tcPr/>
+                    </a:tc>
+                    <a:tc>
+                      <a:txBody>
+                        <a:bodyPr/>
+                        <a:lstStyle/>
+                        <a:p>
+                          <a:r>
+                            <a:rPr lang="en-US" dirty="0"/>
+                            <a:t>General Q &amp; A</a:t>
+                          </a:r>
+                        </a:p>
+                      </a:txBody>
+                      <a:tcPr/>
+                    </a:tc>
+                    <a:tc>
+                      <a:txBody>
+                        <a:bodyPr/>
+                        <a:lstStyle/>
+                        <a:p>
+                          <a:r>
+                            <a:rPr lang="en-US" dirty="0"/>
+                            <a:t>All</a:t>
+                          </a:r>
+                        </a:p>
+                      </a:txBody>
+                      <a:tcPr/>
+                    </a:tc>
+                    <a:extLst>
+                      <a:ext uri="{0D108BD9-81ED-4DB2-BD59-A6C34878D82A}">
+                        <a16:rowId xmlns:a16="http://schemas.microsoft.com/office/drawing/2014/main" val="3034331301"/>
+                      </a:ext>
+                    </a:extLst>
+                  </a:tr>
+                </a:tbl>
+              </a:graphicData>
+            </a:graphic>
+          </p:graphicFrame>
+        </mc:Fallback>
+      </mc:AlternateContent>
       <p:sp>
         <p:nvSpPr>
-          <p:cNvPr id="2" name="TextBox 1">
-            <a:extLst>
-              <a:ext uri="{FF2B5EF4-FFF2-40B4-BE49-F238E27FC236}">
-                <a16:creationId xmlns:a16="http://schemas.microsoft.com/office/drawing/2014/main" id="{B04BFB9E-F1AF-C1B9-A793-D2B5AAF73689}"/>
+          <p:cNvPr id="8" name="TextBox 7">
+            <a:extLst>
+              <a:ext uri="{FF2B5EF4-FFF2-40B4-BE49-F238E27FC236}">
+                <a16:creationId xmlns:a16="http://schemas.microsoft.com/office/drawing/2014/main" id="{AF0DCC40-E456-7010-3A1B-E61FD4F24C95}"/>
               </a:ext>
             </a:extLst>
           </p:cNvPr>
@@ -5969,7 +6816,7 @@
           <a:p>
             <a:r>
               <a:rPr lang="en-US" sz="2400" dirty="0"/>
-              <a:t>Sunday 15</a:t>
+              <a:t>Sunday 28</a:t>
             </a:r>
             <a:r>
               <a:rPr lang="en-US" sz="2400" baseline="30000" dirty="0"/>
@@ -5977,13 +6824,18 @@
             </a:r>
             <a:r>
               <a:rPr lang="en-US" sz="2400" dirty="0"/>
-              <a:t> of June</a:t>
-            </a:r>
-            <a:r>
-              <a:rPr lang="en-US" sz="2400"/>
-              <a:t>, 9:00 to 12:30</a:t>
-            </a:r>
-            <a:endParaRPr lang="en-US" sz="2400" dirty="0"/>
+              <a:t> of June, 8:35 to 12:</a:t>
+            </a:r>
+            <a:r>
+              <a:rPr lang="en-US" sz="2400" dirty="0">
+                <a:sym typeface="Wingdings" pitchFamily="2" charset="2"/>
+              </a:rPr>
+              <a:t>0</a:t>
+            </a:r>
+            <a:r>
+              <a:rPr lang="en-US" sz="2400" dirty="0"/>
+              <a:t>0</a:t>
+            </a:r>
           </a:p>
         </p:txBody>
       </p:sp>
@@ -6306,66 +7158,6 @@
               </a:rPr>
               <a:t>Zero, one, or more events</a:t>
             </a:r>
-          </a:p>
-        </p:txBody>
-      </p:sp>
-      <p:sp>
-        <p:nvSpPr>
-          <p:cNvPr id="3" name="TextBox 2">
-            <a:extLst>
-              <a:ext uri="{FF2B5EF4-FFF2-40B4-BE49-F238E27FC236}">
-                <a16:creationId xmlns:a16="http://schemas.microsoft.com/office/drawing/2014/main" id="{A523ED93-644A-3EFA-77FB-5B88C9CFBCD9}"/>
-              </a:ext>
-            </a:extLst>
-          </p:cNvPr>
-          <p:cNvSpPr txBox="1"/>
-          <p:nvPr/>
-        </p:nvSpPr>
-        <p:spPr>
-          <a:xfrm>
-            <a:off x="8471339" y="3631962"/>
-            <a:ext cx="2120004" cy="369332"/>
-          </a:xfrm>
-          <a:prstGeom prst="rect">
-            <a:avLst/>
-          </a:prstGeom>
-          <a:noFill/>
-        </p:spPr>
-        <p:txBody>
-          <a:bodyPr wrap="none" rtlCol="0">
-            <a:spAutoFit/>
-          </a:bodyPr>
-          <a:lstStyle/>
-          <a:p>
-            <a:r>
-              <a:rPr lang="en-US" i="1" dirty="0"/>
-              <a:t>Simulation window</a:t>
-            </a:r>
-          </a:p>
-        </p:txBody>
-      </p:sp>
-      <p:sp>
-        <p:nvSpPr>
-          <p:cNvPr id="5" name="Content Placeholder 4">
-            <a:extLst>
-              <a:ext uri="{FF2B5EF4-FFF2-40B4-BE49-F238E27FC236}">
-                <a16:creationId xmlns:a16="http://schemas.microsoft.com/office/drawing/2014/main" id="{C8E37FEA-159D-E330-CFBF-BE1ED9343E0E}"/>
-              </a:ext>
-            </a:extLst>
-          </p:cNvPr>
-          <p:cNvSpPr>
-            <a:spLocks noGrp="1"/>
-          </p:cNvSpPr>
-          <p:nvPr>
-            <p:ph sz="half" idx="2"/>
-          </p:nvPr>
-        </p:nvSpPr>
-        <p:spPr/>
-        <p:txBody>
-          <a:bodyPr/>
-          <a:lstStyle/>
-          <a:p>
-            <a:endParaRPr lang="en-US"/>
           </a:p>
         </p:txBody>
       </p:sp>
@@ -13245,668 +14037,6 @@
           <a:chExt cx="0" cy="0"/>
         </a:xfrm>
       </p:grpSpPr>
-      <p:graphicFrame>
-        <p:nvGraphicFramePr>
-          <p:cNvPr id="4" name="Content Placeholder 3">
-            <a:extLst>
-              <a:ext uri="{FF2B5EF4-FFF2-40B4-BE49-F238E27FC236}">
-                <a16:creationId xmlns:a16="http://schemas.microsoft.com/office/drawing/2014/main" id="{655314A2-2BED-36EA-B4B2-DECEE9EBBB31}"/>
-              </a:ext>
-            </a:extLst>
-          </p:cNvPr>
-          <p:cNvGraphicFramePr>
-            <a:graphicFrameLocks noGrp="1"/>
-          </p:cNvGraphicFramePr>
-          <p:nvPr>
-            <p:ph idx="1"/>
-          </p:nvPr>
-        </p:nvGraphicFramePr>
-        <p:xfrm>
-          <a:off x="1208690" y="942340"/>
-          <a:ext cx="10720551" cy="4973320"/>
-        </p:xfrm>
-        <a:graphic>
-          <a:graphicData uri="http://schemas.openxmlformats.org/drawingml/2006/table">
-            <a:tbl>
-              <a:tblPr firstRow="1" bandRow="1">
-                <a:tableStyleId>{21E4AEA4-8DFA-4A89-87EB-49C32662AFE0}</a:tableStyleId>
-              </a:tblPr>
-              <a:tblGrid>
-                <a:gridCol w="1717110">
-                  <a:extLst>
-                    <a:ext uri="{9D8B030D-6E8A-4147-A177-3AD203B41FA5}">
-                      <a16:colId xmlns:a16="http://schemas.microsoft.com/office/drawing/2014/main" val="4182014441"/>
-                    </a:ext>
-                  </a:extLst>
-                </a:gridCol>
-                <a:gridCol w="5976462">
-                  <a:extLst>
-                    <a:ext uri="{9D8B030D-6E8A-4147-A177-3AD203B41FA5}">
-                      <a16:colId xmlns:a16="http://schemas.microsoft.com/office/drawing/2014/main" val="906180283"/>
-                    </a:ext>
-                  </a:extLst>
-                </a:gridCol>
-                <a:gridCol w="3026979">
-                  <a:extLst>
-                    <a:ext uri="{9D8B030D-6E8A-4147-A177-3AD203B41FA5}">
-                      <a16:colId xmlns:a16="http://schemas.microsoft.com/office/drawing/2014/main" val="2769721792"/>
-                    </a:ext>
-                  </a:extLst>
-                </a:gridCol>
-              </a:tblGrid>
-              <a:tr h="370840">
-                <a:tc>
-                  <a:txBody>
-                    <a:bodyPr/>
-                    <a:lstStyle/>
-                    <a:p>
-                      <a:r>
-                        <a:rPr lang="en-US" dirty="0"/>
-                        <a:t>Time</a:t>
-                      </a:r>
-                    </a:p>
-                  </a:txBody>
-                  <a:tcPr/>
-                </a:tc>
-                <a:tc>
-                  <a:txBody>
-                    <a:bodyPr/>
-                    <a:lstStyle/>
-                    <a:p>
-                      <a:r>
-                        <a:rPr lang="en-US" dirty="0"/>
-                        <a:t>Description</a:t>
-                      </a:r>
-                    </a:p>
-                  </a:txBody>
-                  <a:tcPr/>
-                </a:tc>
-                <a:tc>
-                  <a:txBody>
-                    <a:bodyPr/>
-                    <a:lstStyle/>
-                    <a:p>
-                      <a:r>
-                        <a:rPr lang="en-US" dirty="0"/>
-                        <a:t>Discussant</a:t>
-                      </a:r>
-                    </a:p>
-                  </a:txBody>
-                  <a:tcPr/>
-                </a:tc>
-                <a:extLst>
-                  <a:ext uri="{0D108BD9-81ED-4DB2-BD59-A6C34878D82A}">
-                    <a16:rowId xmlns:a16="http://schemas.microsoft.com/office/drawing/2014/main" val="1700444250"/>
-                  </a:ext>
-                </a:extLst>
-              </a:tr>
-              <a:tr h="370840">
-                <a:tc>
-                  <a:txBody>
-                    <a:bodyPr/>
-                    <a:lstStyle/>
-                    <a:p>
-                      <a:r>
-                        <a:rPr lang="en-US" dirty="0"/>
-                        <a:t>[15 min]</a:t>
-                      </a:r>
-                    </a:p>
-                  </a:txBody>
-                  <a:tcPr/>
-                </a:tc>
-                <a:tc>
-                  <a:txBody>
-                    <a:bodyPr/>
-                    <a:lstStyle/>
-                    <a:p>
-                      <a:r>
-                        <a:rPr lang="en-US" sz="1800" kern="1200" dirty="0">
-                          <a:solidFill>
-                            <a:schemeClr val="dk1"/>
-                          </a:solidFill>
-                          <a:effectLst/>
-                          <a:latin typeface="+mn-lt"/>
-                          <a:ea typeface="+mn-ea"/>
-                          <a:cs typeface="+mn-cs"/>
-                        </a:rPr>
-                        <a:t>(0) Introductions and administrivia </a:t>
-                      </a:r>
-                      <a:endParaRPr lang="en-US" dirty="0"/>
-                    </a:p>
-                  </a:txBody>
-                  <a:tcPr/>
-                </a:tc>
-                <a:tc>
-                  <a:txBody>
-                    <a:bodyPr/>
-                    <a:lstStyle/>
-                    <a:p>
-                      <a:r>
-                        <a:rPr lang="en-US" dirty="0" err="1"/>
-                        <a:t>Trikalinos</a:t>
-                      </a:r>
-                      <a:endParaRPr lang="en-US" dirty="0"/>
-                    </a:p>
-                  </a:txBody>
-                  <a:tcPr/>
-                </a:tc>
-                <a:extLst>
-                  <a:ext uri="{0D108BD9-81ED-4DB2-BD59-A6C34878D82A}">
-                    <a16:rowId xmlns:a16="http://schemas.microsoft.com/office/drawing/2014/main" val="2490995723"/>
-                  </a:ext>
-                </a:extLst>
-              </a:tr>
-              <a:tr h="370840">
-                <a:tc>
-                  <a:txBody>
-                    <a:bodyPr/>
-                    <a:lstStyle/>
-                    <a:p>
-                      <a:r>
-                        <a:rPr lang="en-US" dirty="0"/>
-                        <a:t>[25 min]</a:t>
-                      </a:r>
-                    </a:p>
-                  </a:txBody>
-                  <a:tcPr/>
-                </a:tc>
-                <a:tc>
-                  <a:txBody>
-                    <a:bodyPr/>
-                    <a:lstStyle/>
-                    <a:p>
-                      <a:r>
-                        <a:rPr lang="en-US" sz="1800" kern="1200" dirty="0">
-                          <a:solidFill>
-                            <a:schemeClr val="dk1"/>
-                          </a:solidFill>
-                          <a:effectLst/>
-                          <a:latin typeface="+mn-lt"/>
-                          <a:ea typeface="+mn-ea"/>
-                          <a:cs typeface="+mn-cs"/>
-                        </a:rPr>
-                        <a:t>(1) DES as a composition of point processes</a:t>
-                      </a:r>
-                    </a:p>
-                  </a:txBody>
-                  <a:tcPr/>
-                </a:tc>
-                <a:tc>
-                  <a:txBody>
-                    <a:bodyPr/>
-                    <a:lstStyle/>
-                    <a:p>
-                      <a:r>
-                        <a:rPr lang="en-US" dirty="0" err="1"/>
-                        <a:t>Alarid</a:t>
-                      </a:r>
-                      <a:r>
-                        <a:rPr lang="en-US" dirty="0"/>
-                        <a:t>-Escudero</a:t>
-                      </a:r>
-                    </a:p>
-                  </a:txBody>
-                  <a:tcPr/>
-                </a:tc>
-                <a:extLst>
-                  <a:ext uri="{0D108BD9-81ED-4DB2-BD59-A6C34878D82A}">
-                    <a16:rowId xmlns:a16="http://schemas.microsoft.com/office/drawing/2014/main" val="2065491183"/>
-                  </a:ext>
-                </a:extLst>
-              </a:tr>
-              <a:tr h="370840">
-                <a:tc>
-                  <a:txBody>
-                    <a:bodyPr/>
-                    <a:lstStyle/>
-                    <a:p>
-                      <a:r>
-                        <a:rPr lang="en-US" dirty="0"/>
-                        <a:t>[30 min]</a:t>
-                      </a:r>
-                    </a:p>
-                  </a:txBody>
-                  <a:tcPr/>
-                </a:tc>
-                <a:tc>
-                  <a:txBody>
-                    <a:bodyPr/>
-                    <a:lstStyle/>
-                    <a:p>
-                      <a:pPr marL="0" marR="0" lvl="0" indent="0" algn="l" defTabSz="914400" rtl="0" eaLnBrk="1" fontAlgn="auto" latinLnBrk="0" hangingPunct="1">
-                        <a:lnSpc>
-                          <a:spcPct val="100000"/>
-                        </a:lnSpc>
-                        <a:spcBef>
-                          <a:spcPts val="0"/>
-                        </a:spcBef>
-                        <a:spcAft>
-                          <a:spcPts val="0"/>
-                        </a:spcAft>
-                        <a:buClrTx/>
-                        <a:buSzTx/>
-                        <a:buFontTx/>
-                        <a:buNone/>
-                        <a:tabLst/>
-                        <a:defRPr/>
-                      </a:pPr>
-                      <a:r>
-                        <a:rPr lang="en-US" sz="1800" kern="1200" dirty="0">
-                          <a:solidFill>
-                            <a:schemeClr val="dk1"/>
-                          </a:solidFill>
-                          <a:effectLst/>
-                          <a:latin typeface="+mn-lt"/>
-                          <a:ea typeface="+mn-ea"/>
-                          <a:cs typeface="+mn-cs"/>
-                        </a:rPr>
-                        <a:t>(2) NHPPPs – key properties</a:t>
-                      </a:r>
-                    </a:p>
-                  </a:txBody>
-                  <a:tcPr/>
-                </a:tc>
-                <a:tc>
-                  <a:txBody>
-                    <a:bodyPr/>
-                    <a:lstStyle/>
-                    <a:p>
-                      <a:r>
-                        <a:rPr lang="en-US" dirty="0" err="1"/>
-                        <a:t>Trikalinos</a:t>
-                      </a:r>
-                      <a:endParaRPr lang="en-US" dirty="0"/>
-                    </a:p>
-                  </a:txBody>
-                  <a:tcPr/>
-                </a:tc>
-                <a:extLst>
-                  <a:ext uri="{0D108BD9-81ED-4DB2-BD59-A6C34878D82A}">
-                    <a16:rowId xmlns:a16="http://schemas.microsoft.com/office/drawing/2014/main" val="2757944147"/>
-                  </a:ext>
-                </a:extLst>
-              </a:tr>
-              <a:tr h="370840">
-                <a:tc>
-                  <a:txBody>
-                    <a:bodyPr/>
-                    <a:lstStyle/>
-                    <a:p>
-                      <a:r>
-                        <a:rPr lang="en-US" dirty="0"/>
-                        <a:t>[30 min]</a:t>
-                      </a:r>
-                    </a:p>
-                  </a:txBody>
-                  <a:tcPr/>
-                </a:tc>
-                <a:tc>
-                  <a:txBody>
-                    <a:bodyPr/>
-                    <a:lstStyle/>
-                    <a:p>
-                      <a:r>
-                        <a:rPr lang="en-US" sz="1800" kern="1200" dirty="0">
-                          <a:solidFill>
-                            <a:schemeClr val="dk1"/>
-                          </a:solidFill>
-                          <a:effectLst/>
-                          <a:latin typeface="+mn-lt"/>
-                          <a:ea typeface="+mn-ea"/>
-                          <a:cs typeface="+mn-cs"/>
-                        </a:rPr>
-                        <a:t>(3) Sampling from NHPPPs</a:t>
-                      </a:r>
-                      <a:endParaRPr lang="en-US" dirty="0"/>
-                    </a:p>
-                  </a:txBody>
-                  <a:tcPr/>
-                </a:tc>
-                <a:tc>
-                  <a:txBody>
-                    <a:bodyPr/>
-                    <a:lstStyle/>
-                    <a:p>
-                      <a:r>
-                        <a:rPr lang="en-US" dirty="0" err="1"/>
-                        <a:t>Sereda</a:t>
-                      </a:r>
-                      <a:endParaRPr lang="en-US" dirty="0"/>
-                    </a:p>
-                  </a:txBody>
-                  <a:tcPr/>
-                </a:tc>
-                <a:extLst>
-                  <a:ext uri="{0D108BD9-81ED-4DB2-BD59-A6C34878D82A}">
-                    <a16:rowId xmlns:a16="http://schemas.microsoft.com/office/drawing/2014/main" val="1442363784"/>
-                  </a:ext>
-                </a:extLst>
-              </a:tr>
-              <a:tr h="370840">
-                <a:tc>
-                  <a:txBody>
-                    <a:bodyPr/>
-                    <a:lstStyle/>
-                    <a:p>
-                      <a:r>
-                        <a:rPr lang="en-US" dirty="0"/>
-                        <a:t>[15 min]</a:t>
-                      </a:r>
-                    </a:p>
-                  </a:txBody>
-                  <a:tcPr/>
-                </a:tc>
-                <a:tc>
-                  <a:txBody>
-                    <a:bodyPr/>
-                    <a:lstStyle/>
-                    <a:p>
-                      <a:pPr marL="0" marR="0" lvl="0" indent="0" algn="l" defTabSz="914400" rtl="0" eaLnBrk="1" fontAlgn="auto" latinLnBrk="0" hangingPunct="1">
-                        <a:lnSpc>
-                          <a:spcPct val="100000"/>
-                        </a:lnSpc>
-                        <a:spcBef>
-                          <a:spcPts val="0"/>
-                        </a:spcBef>
-                        <a:spcAft>
-                          <a:spcPts val="0"/>
-                        </a:spcAft>
-                        <a:buClrTx/>
-                        <a:buSzTx/>
-                        <a:buFontTx/>
-                        <a:buNone/>
-                        <a:tabLst/>
-                        <a:defRPr/>
-                      </a:pPr>
-                      <a:r>
-                        <a:rPr lang="en-US" b="1" dirty="0"/>
-                        <a:t>Break</a:t>
-                      </a:r>
-                    </a:p>
-                  </a:txBody>
-                  <a:tcPr/>
-                </a:tc>
-                <a:tc>
-                  <a:txBody>
-                    <a:bodyPr/>
-                    <a:lstStyle/>
-                    <a:p>
-                      <a:endParaRPr lang="en-US" dirty="0"/>
-                    </a:p>
-                  </a:txBody>
-                  <a:tcPr/>
-                </a:tc>
-                <a:extLst>
-                  <a:ext uri="{0D108BD9-81ED-4DB2-BD59-A6C34878D82A}">
-                    <a16:rowId xmlns:a16="http://schemas.microsoft.com/office/drawing/2014/main" val="1269228105"/>
-                  </a:ext>
-                </a:extLst>
-              </a:tr>
-              <a:tr h="370840">
-                <a:tc>
-                  <a:txBody>
-                    <a:bodyPr/>
-                    <a:lstStyle/>
-                    <a:p>
-                      <a:r>
-                        <a:rPr lang="en-US" dirty="0"/>
-                        <a:t>[80 min]</a:t>
-                      </a:r>
-                    </a:p>
-                  </a:txBody>
-                  <a:tcPr/>
-                </a:tc>
-                <a:tc>
-                  <a:txBody>
-                    <a:bodyPr/>
-                    <a:lstStyle/>
-                    <a:p>
-                      <a:r>
-                        <a:rPr lang="en-US" sz="1800" kern="1200" dirty="0">
-                          <a:solidFill>
-                            <a:schemeClr val="dk1"/>
-                          </a:solidFill>
-                          <a:effectLst/>
-                          <a:latin typeface="+mn-lt"/>
-                          <a:ea typeface="+mn-ea"/>
-                          <a:cs typeface="+mn-cs"/>
-                        </a:rPr>
-                        <a:t>(4) Guided exercise: </a:t>
-                      </a:r>
-                    </a:p>
-                    <a:p>
-                      <a:pPr marL="285750" indent="-285750">
-                        <a:buFontTx/>
-                        <a:buChar char="-"/>
-                      </a:pPr>
-                      <a:r>
-                        <a:rPr lang="en-US" sz="1800" kern="1200" dirty="0">
-                          <a:solidFill>
-                            <a:schemeClr val="dk1"/>
-                          </a:solidFill>
-                          <a:effectLst/>
-                          <a:latin typeface="+mn-lt"/>
-                          <a:ea typeface="+mn-ea"/>
-                          <a:cs typeface="+mn-cs"/>
-                        </a:rPr>
-                        <a:t>Implement a simple cancer natural history DES for one person</a:t>
-                      </a:r>
-                    </a:p>
-                    <a:p>
-                      <a:pPr marL="285750" indent="-285750">
-                        <a:buFontTx/>
-                        <a:buChar char="-"/>
-                      </a:pPr>
-                      <a:r>
-                        <a:rPr lang="en-US" sz="1800" kern="1200" dirty="0">
-                          <a:solidFill>
-                            <a:schemeClr val="dk1"/>
-                          </a:solidFill>
-                          <a:effectLst/>
-                          <a:latin typeface="+mn-lt"/>
-                          <a:ea typeface="+mn-ea"/>
-                          <a:cs typeface="+mn-cs"/>
-                        </a:rPr>
-                        <a:t>The many-person case</a:t>
-                      </a:r>
-                    </a:p>
-                    <a:p>
-                      <a:pPr marL="285750" indent="-285750">
-                        <a:buFontTx/>
-                        <a:buChar char="-"/>
-                      </a:pPr>
-                      <a:r>
-                        <a:rPr lang="en-US" sz="1800" kern="1200" dirty="0">
-                          <a:solidFill>
-                            <a:schemeClr val="dk1"/>
-                          </a:solidFill>
-                          <a:effectLst/>
-                          <a:latin typeface="+mn-lt"/>
-                          <a:ea typeface="+mn-ea"/>
-                          <a:cs typeface="+mn-cs"/>
-                        </a:rPr>
-                        <a:t>Packaging </a:t>
-                      </a:r>
-                    </a:p>
-                  </a:txBody>
-                  <a:tcPr/>
-                </a:tc>
-                <a:tc>
-                  <a:txBody>
-                    <a:bodyPr/>
-                    <a:lstStyle/>
-                    <a:p>
-                      <a:r>
-                        <a:rPr lang="en-US" dirty="0"/>
-                        <a:t>[All]</a:t>
-                      </a:r>
-                    </a:p>
-                    <a:p>
-                      <a:r>
-                        <a:rPr lang="en-US" dirty="0" err="1"/>
-                        <a:t>Chrysanthopoulou</a:t>
-                      </a:r>
-                      <a:endParaRPr lang="en-US" dirty="0"/>
-                    </a:p>
-                    <a:p>
-                      <a:endParaRPr lang="en-US" dirty="0"/>
-                    </a:p>
-                    <a:p>
-                      <a:r>
-                        <a:rPr lang="en-US" dirty="0" err="1"/>
-                        <a:t>Sereda</a:t>
-                      </a:r>
-                      <a:r>
-                        <a:rPr lang="en-US" dirty="0"/>
-                        <a:t>/</a:t>
-                      </a:r>
-                      <a:r>
-                        <a:rPr lang="en-US" dirty="0" err="1"/>
-                        <a:t>Alarid</a:t>
-                      </a:r>
-                      <a:r>
-                        <a:rPr lang="en-US" dirty="0"/>
-                        <a:t>-Escudero</a:t>
-                      </a:r>
-                    </a:p>
-                    <a:p>
-                      <a:r>
-                        <a:rPr lang="en-US" dirty="0" err="1"/>
-                        <a:t>Trikalinos</a:t>
-                      </a:r>
-                      <a:endParaRPr lang="en-US" dirty="0"/>
-                    </a:p>
-                  </a:txBody>
-                  <a:tcPr/>
-                </a:tc>
-                <a:extLst>
-                  <a:ext uri="{0D108BD9-81ED-4DB2-BD59-A6C34878D82A}">
-                    <a16:rowId xmlns:a16="http://schemas.microsoft.com/office/drawing/2014/main" val="1448491104"/>
-                  </a:ext>
-                </a:extLst>
-              </a:tr>
-              <a:tr h="370840">
-                <a:tc>
-                  <a:txBody>
-                    <a:bodyPr/>
-                    <a:lstStyle/>
-                    <a:p>
-                      <a:r>
-                        <a:rPr lang="en-US" dirty="0"/>
-                        <a:t>[10 min]</a:t>
-                      </a:r>
-                    </a:p>
-                  </a:txBody>
-                  <a:tcPr/>
-                </a:tc>
-                <a:tc>
-                  <a:txBody>
-                    <a:bodyPr/>
-                    <a:lstStyle/>
-                    <a:p>
-                      <a:pPr marL="0" marR="0" lvl="0" indent="0" algn="l" defTabSz="914400" rtl="0" eaLnBrk="1" fontAlgn="auto" latinLnBrk="0" hangingPunct="1">
-                        <a:lnSpc>
-                          <a:spcPct val="100000"/>
-                        </a:lnSpc>
-                        <a:spcBef>
-                          <a:spcPts val="0"/>
-                        </a:spcBef>
-                        <a:spcAft>
-                          <a:spcPts val="0"/>
-                        </a:spcAft>
-                        <a:buClrTx/>
-                        <a:buSzTx/>
-                        <a:buFontTx/>
-                        <a:buNone/>
-                        <a:tabLst/>
-                        <a:defRPr/>
-                      </a:pPr>
-                      <a:r>
-                        <a:rPr lang="en-US" sz="1800" kern="1200" dirty="0">
-                          <a:solidFill>
-                            <a:schemeClr val="dk1"/>
-                          </a:solidFill>
-                          <a:effectLst/>
-                          <a:latin typeface="+mn-lt"/>
-                          <a:ea typeface="+mn-ea"/>
-                          <a:cs typeface="+mn-cs"/>
-                        </a:rPr>
-                        <a:t>(5) Advanced Topic Teaser on self-excitatory processes: point processes that are not NHPPPs and when you may need them</a:t>
-                      </a:r>
-                    </a:p>
-                  </a:txBody>
-                  <a:tcPr/>
-                </a:tc>
-                <a:tc>
-                  <a:txBody>
-                    <a:bodyPr/>
-                    <a:lstStyle/>
-                    <a:p>
-                      <a:r>
-                        <a:rPr lang="en-US" dirty="0" err="1"/>
-                        <a:t>Trikalinos</a:t>
-                      </a:r>
-                      <a:endParaRPr lang="en-US" dirty="0"/>
-                    </a:p>
-                  </a:txBody>
-                  <a:tcPr/>
-                </a:tc>
-                <a:extLst>
-                  <a:ext uri="{0D108BD9-81ED-4DB2-BD59-A6C34878D82A}">
-                    <a16:rowId xmlns:a16="http://schemas.microsoft.com/office/drawing/2014/main" val="3766472740"/>
-                  </a:ext>
-                </a:extLst>
-              </a:tr>
-              <a:tr h="370840">
-                <a:tc>
-                  <a:txBody>
-                    <a:bodyPr/>
-                    <a:lstStyle/>
-                    <a:p>
-                      <a:r>
-                        <a:rPr lang="en-US" dirty="0"/>
-                        <a:t>[15 min]</a:t>
-                      </a:r>
-                    </a:p>
-                  </a:txBody>
-                  <a:tcPr/>
-                </a:tc>
-                <a:tc>
-                  <a:txBody>
-                    <a:bodyPr/>
-                    <a:lstStyle/>
-                    <a:p>
-                      <a:r>
-                        <a:rPr lang="en-US" dirty="0"/>
-                        <a:t>General Q &amp; A</a:t>
-                      </a:r>
-                    </a:p>
-                  </a:txBody>
-                  <a:tcPr/>
-                </a:tc>
-                <a:tc>
-                  <a:txBody>
-                    <a:bodyPr/>
-                    <a:lstStyle/>
-                    <a:p>
-                      <a:r>
-                        <a:rPr lang="en-US" dirty="0"/>
-                        <a:t>All</a:t>
-                      </a:r>
-                    </a:p>
-                  </a:txBody>
-                  <a:tcPr/>
-                </a:tc>
-                <a:extLst>
-                  <a:ext uri="{0D108BD9-81ED-4DB2-BD59-A6C34878D82A}">
-                    <a16:rowId xmlns:a16="http://schemas.microsoft.com/office/drawing/2014/main" val="3034331301"/>
-                  </a:ext>
-                </a:extLst>
-              </a:tr>
-            </a:tbl>
-          </a:graphicData>
-        </a:graphic>
-      </p:graphicFrame>
       <p:sp>
         <p:nvSpPr>
           <p:cNvPr id="5" name="Right Arrow 4">
@@ -13960,12 +14090,1437 @@
           </a:p>
         </p:txBody>
       </p:sp>
+      <mc:AlternateContent xmlns:mc="http://schemas.openxmlformats.org/markup-compatibility/2006">
+        <mc:Choice xmlns:a14="http://schemas.microsoft.com/office/drawing/2010/main" Requires="a14">
+          <p:graphicFrame>
+            <p:nvGraphicFramePr>
+              <p:cNvPr id="7" name="Content Placeholder 3">
+                <a:extLst>
+                  <a:ext uri="{FF2B5EF4-FFF2-40B4-BE49-F238E27FC236}">
+                    <a16:creationId xmlns:a16="http://schemas.microsoft.com/office/drawing/2014/main" id="{52DDDD06-E807-C276-7248-8305B3CBD17D}"/>
+                  </a:ext>
+                </a:extLst>
+              </p:cNvPr>
+              <p:cNvGraphicFramePr>
+                <a:graphicFrameLocks/>
+              </p:cNvGraphicFramePr>
+              <p:nvPr>
+                <p:extLst>
+                  <p:ext uri="{D42A27DB-BD31-4B8C-83A1-F6EECF244321}">
+                    <p14:modId xmlns:p14="http://schemas.microsoft.com/office/powerpoint/2010/main" val="260976388"/>
+                  </p:ext>
+                </p:extLst>
+              </p:nvPr>
+            </p:nvGraphicFramePr>
+            <p:xfrm>
+              <a:off x="1208690" y="942340"/>
+              <a:ext cx="10720551" cy="4699000"/>
+            </p:xfrm>
+            <a:graphic>
+              <a:graphicData uri="http://schemas.openxmlformats.org/drawingml/2006/table">
+                <a:tbl>
+                  <a:tblPr firstRow="1" bandRow="1">
+                    <a:tableStyleId>{21E4AEA4-8DFA-4A89-87EB-49C32662AFE0}</a:tableStyleId>
+                  </a:tblPr>
+                  <a:tblGrid>
+                    <a:gridCol w="1717110">
+                      <a:extLst>
+                        <a:ext uri="{9D8B030D-6E8A-4147-A177-3AD203B41FA5}">
+                          <a16:colId xmlns:a16="http://schemas.microsoft.com/office/drawing/2014/main" val="4182014441"/>
+                        </a:ext>
+                      </a:extLst>
+                    </a:gridCol>
+                    <a:gridCol w="5976462">
+                      <a:extLst>
+                        <a:ext uri="{9D8B030D-6E8A-4147-A177-3AD203B41FA5}">
+                          <a16:colId xmlns:a16="http://schemas.microsoft.com/office/drawing/2014/main" val="906180283"/>
+                        </a:ext>
+                      </a:extLst>
+                    </a:gridCol>
+                    <a:gridCol w="3026979">
+                      <a:extLst>
+                        <a:ext uri="{9D8B030D-6E8A-4147-A177-3AD203B41FA5}">
+                          <a16:colId xmlns:a16="http://schemas.microsoft.com/office/drawing/2014/main" val="2769721792"/>
+                        </a:ext>
+                      </a:extLst>
+                    </a:gridCol>
+                  </a:tblGrid>
+                  <a:tr h="370840">
+                    <a:tc>
+                      <a:txBody>
+                        <a:bodyPr/>
+                        <a:lstStyle/>
+                        <a:p>
+                          <a:r>
+                            <a:rPr lang="en-US" dirty="0"/>
+                            <a:t>Time</a:t>
+                          </a:r>
+                        </a:p>
+                      </a:txBody>
+                      <a:tcPr/>
+                    </a:tc>
+                    <a:tc>
+                      <a:txBody>
+                        <a:bodyPr/>
+                        <a:lstStyle/>
+                        <a:p>
+                          <a:r>
+                            <a:rPr lang="en-US" dirty="0"/>
+                            <a:t>Description</a:t>
+                          </a:r>
+                        </a:p>
+                      </a:txBody>
+                      <a:tcPr/>
+                    </a:tc>
+                    <a:tc>
+                      <a:txBody>
+                        <a:bodyPr/>
+                        <a:lstStyle/>
+                        <a:p>
+                          <a:r>
+                            <a:rPr lang="en-US" dirty="0"/>
+                            <a:t>Discussant</a:t>
+                          </a:r>
+                        </a:p>
+                      </a:txBody>
+                      <a:tcPr/>
+                    </a:tc>
+                    <a:extLst>
+                      <a:ext uri="{0D108BD9-81ED-4DB2-BD59-A6C34878D82A}">
+                        <a16:rowId xmlns:a16="http://schemas.microsoft.com/office/drawing/2014/main" val="1700444250"/>
+                      </a:ext>
+                    </a:extLst>
+                  </a:tr>
+                  <a:tr h="370840">
+                    <a:tc>
+                      <a:txBody>
+                        <a:bodyPr/>
+                        <a:lstStyle/>
+                        <a:p>
+                          <a:r>
+                            <a:rPr lang="en-US" dirty="0"/>
+                            <a:t>[15 min]</a:t>
+                          </a:r>
+                        </a:p>
+                      </a:txBody>
+                      <a:tcPr/>
+                    </a:tc>
+                    <a:tc>
+                      <a:txBody>
+                        <a:bodyPr/>
+                        <a:lstStyle/>
+                        <a:p>
+                          <a:r>
+                            <a:rPr lang="en-US" sz="1800" kern="1200" dirty="0">
+                              <a:solidFill>
+                                <a:schemeClr val="dk1"/>
+                              </a:solidFill>
+                              <a:effectLst/>
+                              <a:latin typeface="+mn-lt"/>
+                              <a:ea typeface="+mn-ea"/>
+                              <a:cs typeface="+mn-cs"/>
+                            </a:rPr>
+                            <a:t>(0) Introductions and administrivia </a:t>
+                          </a:r>
+                          <a:endParaRPr lang="en-US" dirty="0"/>
+                        </a:p>
+                      </a:txBody>
+                      <a:tcPr/>
+                    </a:tc>
+                    <a:tc>
+                      <a:txBody>
+                        <a:bodyPr/>
+                        <a:lstStyle/>
+                        <a:p>
+                          <a:r>
+                            <a:rPr lang="en-US" dirty="0" err="1"/>
+                            <a:t>Trikalinos</a:t>
+                          </a:r>
+                          <a:endParaRPr lang="en-US" dirty="0"/>
+                        </a:p>
+                      </a:txBody>
+                      <a:tcPr/>
+                    </a:tc>
+                    <a:extLst>
+                      <a:ext uri="{0D108BD9-81ED-4DB2-BD59-A6C34878D82A}">
+                        <a16:rowId xmlns:a16="http://schemas.microsoft.com/office/drawing/2014/main" val="2490995723"/>
+                      </a:ext>
+                    </a:extLst>
+                  </a:tr>
+                  <a:tr h="370840">
+                    <a:tc>
+                      <a:txBody>
+                        <a:bodyPr/>
+                        <a:lstStyle/>
+                        <a:p>
+                          <a:r>
+                            <a:rPr lang="en-US" dirty="0"/>
+                            <a:t>[25 min]</a:t>
+                          </a:r>
+                        </a:p>
+                      </a:txBody>
+                      <a:tcPr/>
+                    </a:tc>
+                    <a:tc>
+                      <a:txBody>
+                        <a:bodyPr/>
+                        <a:lstStyle/>
+                        <a:p>
+                          <a:r>
+                            <a:rPr lang="en-US" sz="1800" kern="1200" dirty="0">
+                              <a:solidFill>
+                                <a:schemeClr val="dk1"/>
+                              </a:solidFill>
+                              <a:effectLst/>
+                              <a:latin typeface="+mn-lt"/>
+                              <a:ea typeface="+mn-ea"/>
+                              <a:cs typeface="+mn-cs"/>
+                            </a:rPr>
+                            <a:t>(1) DES as a composition of point processes</a:t>
+                          </a:r>
+                        </a:p>
+                      </a:txBody>
+                      <a:tcPr/>
+                    </a:tc>
+                    <a:tc>
+                      <a:txBody>
+                        <a:bodyPr/>
+                        <a:lstStyle/>
+                        <a:p>
+                          <a:r>
+                            <a:rPr lang="en-US" dirty="0" err="1"/>
+                            <a:t>Alarid</a:t>
+                          </a:r>
+                          <a:r>
+                            <a:rPr lang="en-US" dirty="0"/>
+                            <a:t>-Escudero</a:t>
+                          </a:r>
+                        </a:p>
+                      </a:txBody>
+                      <a:tcPr/>
+                    </a:tc>
+                    <a:extLst>
+                      <a:ext uri="{0D108BD9-81ED-4DB2-BD59-A6C34878D82A}">
+                        <a16:rowId xmlns:a16="http://schemas.microsoft.com/office/drawing/2014/main" val="2065491183"/>
+                      </a:ext>
+                    </a:extLst>
+                  </a:tr>
+                  <a:tr h="370840">
+                    <a:tc>
+                      <a:txBody>
+                        <a:bodyPr/>
+                        <a:lstStyle/>
+                        <a:p>
+                          <a:r>
+                            <a:rPr lang="en-US" dirty="0"/>
+                            <a:t>[30 min]</a:t>
+                          </a:r>
+                        </a:p>
+                      </a:txBody>
+                      <a:tcPr/>
+                    </a:tc>
+                    <a:tc>
+                      <a:txBody>
+                        <a:bodyPr/>
+                        <a:lstStyle/>
+                        <a:p>
+                          <a:pPr marL="0" marR="0" lvl="0" indent="0" algn="l" defTabSz="914400" rtl="0" eaLnBrk="1" fontAlgn="auto" latinLnBrk="0" hangingPunct="1">
+                            <a:lnSpc>
+                              <a:spcPct val="100000"/>
+                            </a:lnSpc>
+                            <a:spcBef>
+                              <a:spcPts val="0"/>
+                            </a:spcBef>
+                            <a:spcAft>
+                              <a:spcPts val="0"/>
+                            </a:spcAft>
+                            <a:buClrTx/>
+                            <a:buSzTx/>
+                            <a:buFontTx/>
+                            <a:buNone/>
+                            <a:tabLst/>
+                            <a:defRPr/>
+                          </a:pPr>
+                          <a:r>
+                            <a:rPr lang="en-US" sz="1800" kern="1200" dirty="0">
+                              <a:solidFill>
+                                <a:schemeClr val="dk1"/>
+                              </a:solidFill>
+                              <a:effectLst/>
+                              <a:latin typeface="+mn-lt"/>
+                              <a:ea typeface="+mn-ea"/>
+                              <a:cs typeface="+mn-cs"/>
+                            </a:rPr>
+                            <a:t>(2) NHPPPs – key properties</a:t>
+                          </a:r>
+                        </a:p>
+                      </a:txBody>
+                      <a:tcPr/>
+                    </a:tc>
+                    <a:tc>
+                      <a:txBody>
+                        <a:bodyPr/>
+                        <a:lstStyle/>
+                        <a:p>
+                          <a:r>
+                            <a:rPr lang="en-US" dirty="0" err="1"/>
+                            <a:t>Trikalinos</a:t>
+                          </a:r>
+                          <a:endParaRPr lang="en-US" dirty="0"/>
+                        </a:p>
+                      </a:txBody>
+                      <a:tcPr/>
+                    </a:tc>
+                    <a:extLst>
+                      <a:ext uri="{0D108BD9-81ED-4DB2-BD59-A6C34878D82A}">
+                        <a16:rowId xmlns:a16="http://schemas.microsoft.com/office/drawing/2014/main" val="2757944147"/>
+                      </a:ext>
+                    </a:extLst>
+                  </a:tr>
+                  <a:tr h="370840">
+                    <a:tc>
+                      <a:txBody>
+                        <a:bodyPr/>
+                        <a:lstStyle/>
+                        <a:p>
+                          <a:r>
+                            <a:rPr lang="en-US" dirty="0"/>
+                            <a:t>[30 min]</a:t>
+                          </a:r>
+                        </a:p>
+                      </a:txBody>
+                      <a:tcPr/>
+                    </a:tc>
+                    <a:tc>
+                      <a:txBody>
+                        <a:bodyPr/>
+                        <a:lstStyle/>
+                        <a:p>
+                          <a:r>
+                            <a:rPr lang="en-US" sz="1800" kern="1200" dirty="0">
+                              <a:solidFill>
+                                <a:schemeClr val="dk1"/>
+                              </a:solidFill>
+                              <a:effectLst/>
+                              <a:latin typeface="+mn-lt"/>
+                              <a:ea typeface="+mn-ea"/>
+                              <a:cs typeface="+mn-cs"/>
+                            </a:rPr>
+                            <a:t>(3) Sampling from NHPPPs</a:t>
+                          </a:r>
+                          <a:endParaRPr lang="en-US" dirty="0"/>
+                        </a:p>
+                      </a:txBody>
+                      <a:tcPr/>
+                    </a:tc>
+                    <a:tc>
+                      <a:txBody>
+                        <a:bodyPr/>
+                        <a:lstStyle/>
+                        <a:p>
+                          <a:pPr marL="0" marR="0" lvl="0" indent="0" algn="l" defTabSz="914400" rtl="0" eaLnBrk="1" fontAlgn="auto" latinLnBrk="0" hangingPunct="1">
+                            <a:lnSpc>
+                              <a:spcPct val="100000"/>
+                            </a:lnSpc>
+                            <a:spcBef>
+                              <a:spcPts val="0"/>
+                            </a:spcBef>
+                            <a:spcAft>
+                              <a:spcPts val="0"/>
+                            </a:spcAft>
+                            <a:buClrTx/>
+                            <a:buSzTx/>
+                            <a:buFontTx/>
+                            <a:buNone/>
+                            <a:tabLst/>
+                            <a:defRPr/>
+                          </a:pPr>
+                          <a:r>
+                            <a:rPr lang="en-US" dirty="0"/>
+                            <a:t>Trikalinos</a:t>
+                          </a:r>
+                        </a:p>
+                      </a:txBody>
+                      <a:tcPr/>
+                    </a:tc>
+                    <a:extLst>
+                      <a:ext uri="{0D108BD9-81ED-4DB2-BD59-A6C34878D82A}">
+                        <a16:rowId xmlns:a16="http://schemas.microsoft.com/office/drawing/2014/main" val="1442363784"/>
+                      </a:ext>
+                    </a:extLst>
+                  </a:tr>
+                  <a:tr h="370840">
+                    <a:tc>
+                      <a:txBody>
+                        <a:bodyPr/>
+                        <a:lstStyle/>
+                        <a:p>
+                          <a:r>
+                            <a:rPr lang="en-US" dirty="0"/>
+                            <a:t>[15 min]</a:t>
+                          </a:r>
+                        </a:p>
+                      </a:txBody>
+                      <a:tcPr/>
+                    </a:tc>
+                    <a:tc>
+                      <a:txBody>
+                        <a:bodyPr/>
+                        <a:lstStyle/>
+                        <a:p>
+                          <a:pPr marL="0" marR="0" lvl="0" indent="0" algn="l" defTabSz="914400" rtl="0" eaLnBrk="1" fontAlgn="auto" latinLnBrk="0" hangingPunct="1">
+                            <a:lnSpc>
+                              <a:spcPct val="100000"/>
+                            </a:lnSpc>
+                            <a:spcBef>
+                              <a:spcPts val="0"/>
+                            </a:spcBef>
+                            <a:spcAft>
+                              <a:spcPts val="0"/>
+                            </a:spcAft>
+                            <a:buClrTx/>
+                            <a:buSzTx/>
+                            <a:buFontTx/>
+                            <a:buNone/>
+                            <a:tabLst/>
+                            <a:defRPr/>
+                          </a:pPr>
+                          <a:r>
+                            <a:rPr lang="en-US" b="1" dirty="0"/>
+                            <a:t>Break</a:t>
+                          </a:r>
+                        </a:p>
+                      </a:txBody>
+                      <a:tcPr/>
+                    </a:tc>
+                    <a:tc>
+                      <a:txBody>
+                        <a:bodyPr/>
+                        <a:lstStyle/>
+                        <a:p>
+                          <a:endParaRPr lang="en-US" dirty="0"/>
+                        </a:p>
+                      </a:txBody>
+                      <a:tcPr/>
+                    </a:tc>
+                    <a:extLst>
+                      <a:ext uri="{0D108BD9-81ED-4DB2-BD59-A6C34878D82A}">
+                        <a16:rowId xmlns:a16="http://schemas.microsoft.com/office/drawing/2014/main" val="1269228105"/>
+                      </a:ext>
+                    </a:extLst>
+                  </a:tr>
+                  <a:tr h="370840">
+                    <a:tc>
+                      <a:txBody>
+                        <a:bodyPr/>
+                        <a:lstStyle/>
+                        <a:p>
+                          <a:r>
+                            <a:rPr lang="en-US" dirty="0"/>
+                            <a:t>[80 min]</a:t>
+                          </a:r>
+                        </a:p>
+                      </a:txBody>
+                      <a:tcPr/>
+                    </a:tc>
+                    <a:tc>
+                      <a:txBody>
+                        <a:bodyPr/>
+                        <a:lstStyle/>
+                        <a:p>
+                          <a:r>
+                            <a:rPr lang="en-US" sz="1800" kern="1200" dirty="0">
+                              <a:solidFill>
+                                <a:schemeClr val="dk1"/>
+                              </a:solidFill>
+                              <a:effectLst/>
+                              <a:latin typeface="+mn-lt"/>
+                              <a:ea typeface="+mn-ea"/>
+                              <a:cs typeface="+mn-cs"/>
+                            </a:rPr>
+                            <a:t>(4) Working with code</a:t>
+                          </a:r>
+                        </a:p>
+                        <a:p>
+                          <a:r>
+                            <a:rPr lang="en-US" sz="1800" kern="1200" dirty="0">
+                              <a:solidFill>
+                                <a:schemeClr val="dk1"/>
+                              </a:solidFill>
+                              <a:effectLst/>
+                              <a:latin typeface="+mn-lt"/>
+                              <a:ea typeface="+mn-ea"/>
+                              <a:cs typeface="+mn-cs"/>
+                            </a:rPr>
+                            <a:t>-- Base </a:t>
+                          </a:r>
+                          <a:r>
+                            <a:rPr lang="en-US" sz="1800" kern="1200" dirty="0">
+                              <a:solidFill>
+                                <a:schemeClr val="dk1"/>
+                              </a:solidFill>
+                              <a:effectLst/>
+                              <a:latin typeface="Courier New" panose="02070309020205020404" pitchFamily="49" charset="0"/>
+                              <a:ea typeface="+mn-ea"/>
+                              <a:cs typeface="Courier New" panose="02070309020205020404" pitchFamily="49" charset="0"/>
+                            </a:rPr>
+                            <a:t>R</a:t>
+                          </a:r>
+                          <a:r>
+                            <a:rPr lang="en-US" sz="1800" kern="1200" dirty="0">
+                              <a:solidFill>
+                                <a:schemeClr val="dk1"/>
+                              </a:solidFill>
+                              <a:effectLst/>
+                              <a:latin typeface="+mn-lt"/>
+                              <a:ea typeface="+mn-ea"/>
+                              <a:cs typeface="+mn-cs"/>
+                            </a:rPr>
+                            <a:t> vs </a:t>
+                          </a:r>
+                          <a:r>
+                            <a:rPr lang="en-US" sz="1800" kern="1200" dirty="0" err="1">
+                              <a:solidFill>
+                                <a:schemeClr val="dk1"/>
+                              </a:solidFill>
+                              <a:effectLst/>
+                              <a:latin typeface="Courier New" panose="02070309020205020404" pitchFamily="49" charset="0"/>
+                              <a:ea typeface="+mn-ea"/>
+                              <a:cs typeface="Courier New" panose="02070309020205020404" pitchFamily="49" charset="0"/>
+                            </a:rPr>
+                            <a:t>nhppp</a:t>
+                          </a:r>
+                          <a:r>
+                            <a:rPr lang="en-US" sz="1800" kern="1200" dirty="0">
+                              <a:solidFill>
+                                <a:schemeClr val="dk1"/>
+                              </a:solidFill>
+                              <a:effectLst/>
+                              <a:latin typeface="+mn-lt"/>
+                              <a:ea typeface="+mn-ea"/>
+                              <a:cs typeface="+mn-cs"/>
+                            </a:rPr>
+                            <a:t>:  Simulate first vs all events in </a:t>
+                          </a:r>
+                          <a14:m>
+                            <m:oMath xmlns:m="http://schemas.openxmlformats.org/officeDocument/2006/math">
+                              <m:r>
+                                <a:rPr lang="en-US" sz="1800" b="0" i="1" kern="1200" smtClean="0">
+                                  <a:solidFill>
+                                    <a:schemeClr val="dk1"/>
+                                  </a:solidFill>
+                                  <a:effectLst/>
+                                  <a:latin typeface="Cambria Math" panose="02040503050406030204" pitchFamily="18" charset="0"/>
+                                  <a:ea typeface="+mn-ea"/>
+                                  <a:cs typeface="+mn-cs"/>
+                                </a:rPr>
+                                <m:t>(</m:t>
+                              </m:r>
+                              <m:r>
+                                <m:rPr>
+                                  <m:sty m:val="p"/>
+                                </m:rPr>
+                                <a:rPr lang="en-US" sz="1800" b="0" i="1" kern="1200" smtClean="0">
+                                  <a:solidFill>
+                                    <a:schemeClr val="dk1"/>
+                                  </a:solidFill>
+                                  <a:effectLst/>
+                                  <a:latin typeface="Cambria Math" panose="02040503050406030204" pitchFamily="18" charset="0"/>
+                                  <a:ea typeface="+mn-ea"/>
+                                  <a:cs typeface="+mn-cs"/>
+                                </a:rPr>
+                                <m:t>a</m:t>
+                              </m:r>
+                              <m:r>
+                                <a:rPr lang="en-US" sz="1800" b="0" i="1" kern="1200" smtClean="0">
+                                  <a:solidFill>
+                                    <a:schemeClr val="dk1"/>
+                                  </a:solidFill>
+                                  <a:effectLst/>
+                                  <a:latin typeface="Cambria Math" panose="02040503050406030204" pitchFamily="18" charset="0"/>
+                                  <a:ea typeface="+mn-ea"/>
+                                  <a:cs typeface="+mn-cs"/>
+                                </a:rPr>
+                                <m:t>,</m:t>
+                              </m:r>
+                              <m:r>
+                                <m:rPr>
+                                  <m:sty m:val="p"/>
+                                </m:rPr>
+                                <a:rPr lang="en-US" sz="1800" b="0" i="1" kern="1200" smtClean="0">
+                                  <a:solidFill>
+                                    <a:schemeClr val="dk1"/>
+                                  </a:solidFill>
+                                  <a:effectLst/>
+                                  <a:latin typeface="Cambria Math" panose="02040503050406030204" pitchFamily="18" charset="0"/>
+                                  <a:ea typeface="+mn-ea"/>
+                                  <a:cs typeface="+mn-cs"/>
+                                </a:rPr>
+                                <m:t>b</m:t>
+                              </m:r>
+                              <m:r>
+                                <a:rPr lang="en-US" sz="1800" b="0" i="1" kern="1200" smtClean="0">
+                                  <a:solidFill>
+                                    <a:schemeClr val="dk1"/>
+                                  </a:solidFill>
+                                  <a:effectLst/>
+                                  <a:latin typeface="Cambria Math" panose="02040503050406030204" pitchFamily="18" charset="0"/>
+                                  <a:ea typeface="+mn-ea"/>
+                                  <a:cs typeface="+mn-cs"/>
+                                </a:rPr>
+                                <m:t>]</m:t>
+                              </m:r>
+                            </m:oMath>
+                          </a14:m>
+                          <a:endParaRPr lang="en-US" sz="1800" kern="1200" dirty="0">
+                            <a:solidFill>
+                              <a:schemeClr val="dk1"/>
+                            </a:solidFill>
+                            <a:effectLst/>
+                            <a:latin typeface="+mn-lt"/>
+                            <a:ea typeface="+mn-ea"/>
+                            <a:cs typeface="+mn-cs"/>
+                          </a:endParaRPr>
+                        </a:p>
+                        <a:p>
+                          <a:r>
+                            <a:rPr lang="en-US" sz="1800" kern="1200" dirty="0">
+                              <a:solidFill>
+                                <a:schemeClr val="dk1"/>
+                              </a:solidFill>
+                              <a:effectLst/>
+                              <a:latin typeface="+mn-lt"/>
+                              <a:ea typeface="+mn-ea"/>
+                              <a:cs typeface="+mn-cs"/>
+                            </a:rPr>
+                            <a:t>-- Packaging a simple cancer DES </a:t>
+                          </a:r>
+                        </a:p>
+                        <a:p>
+                          <a:r>
+                            <a:rPr lang="en-US" sz="1800" kern="1200" dirty="0">
+                              <a:solidFill>
+                                <a:schemeClr val="dk1"/>
+                              </a:solidFill>
+                              <a:effectLst/>
+                              <a:latin typeface="+mn-lt"/>
+                              <a:ea typeface="+mn-ea"/>
+                              <a:cs typeface="+mn-cs"/>
+                            </a:rPr>
+                            <a:t>-- The vectorized case </a:t>
+                          </a:r>
+                        </a:p>
+                      </a:txBody>
+                      <a:tcPr/>
+                    </a:tc>
+                    <a:tc>
+                      <a:txBody>
+                        <a:bodyPr/>
+                        <a:lstStyle/>
+                        <a:p>
+                          <a:r>
+                            <a:rPr lang="en-US" dirty="0"/>
+                            <a:t>[All]</a:t>
+                          </a:r>
+                        </a:p>
+                        <a:p>
+                          <a:r>
+                            <a:rPr lang="en-US" dirty="0"/>
+                            <a:t>Trikalinos</a:t>
+                          </a:r>
+                        </a:p>
+                        <a:p>
+                          <a:r>
+                            <a:rPr lang="en-US" dirty="0"/>
+                            <a:t>Sereda</a:t>
+                          </a:r>
+                        </a:p>
+                        <a:p>
+                          <a:pPr marL="0" marR="0" lvl="0" indent="0" algn="l" defTabSz="914400" rtl="0" eaLnBrk="1" fontAlgn="auto" latinLnBrk="0" hangingPunct="1">
+                            <a:lnSpc>
+                              <a:spcPct val="100000"/>
+                            </a:lnSpc>
+                            <a:spcBef>
+                              <a:spcPts val="0"/>
+                            </a:spcBef>
+                            <a:spcAft>
+                              <a:spcPts val="0"/>
+                            </a:spcAft>
+                            <a:buClrTx/>
+                            <a:buSzTx/>
+                            <a:buFontTx/>
+                            <a:buNone/>
+                            <a:tabLst/>
+                            <a:defRPr/>
+                          </a:pPr>
+                          <a:r>
+                            <a:rPr lang="en-US" dirty="0"/>
+                            <a:t>Sereda</a:t>
+                          </a:r>
+                        </a:p>
+                      </a:txBody>
+                      <a:tcPr/>
+                    </a:tc>
+                    <a:extLst>
+                      <a:ext uri="{0D108BD9-81ED-4DB2-BD59-A6C34878D82A}">
+                        <a16:rowId xmlns:a16="http://schemas.microsoft.com/office/drawing/2014/main" val="1448491104"/>
+                      </a:ext>
+                    </a:extLst>
+                  </a:tr>
+                  <a:tr h="370840">
+                    <a:tc>
+                      <a:txBody>
+                        <a:bodyPr/>
+                        <a:lstStyle/>
+                        <a:p>
+                          <a:r>
+                            <a:rPr lang="en-US" dirty="0"/>
+                            <a:t>[5 min]</a:t>
+                          </a:r>
+                        </a:p>
+                      </a:txBody>
+                      <a:tcPr/>
+                    </a:tc>
+                    <a:tc>
+                      <a:txBody>
+                        <a:bodyPr/>
+                        <a:lstStyle/>
+                        <a:p>
+                          <a:pPr marL="0" marR="0" lvl="0" indent="0" algn="l" defTabSz="914400" rtl="0" eaLnBrk="1" fontAlgn="auto" latinLnBrk="0" hangingPunct="1">
+                            <a:lnSpc>
+                              <a:spcPct val="100000"/>
+                            </a:lnSpc>
+                            <a:spcBef>
+                              <a:spcPts val="0"/>
+                            </a:spcBef>
+                            <a:spcAft>
+                              <a:spcPts val="0"/>
+                            </a:spcAft>
+                            <a:buClrTx/>
+                            <a:buSzTx/>
+                            <a:buFontTx/>
+                            <a:buNone/>
+                            <a:tabLst/>
+                            <a:defRPr/>
+                          </a:pPr>
+                          <a:r>
+                            <a:rPr lang="en-US" sz="1800" kern="1200" dirty="0">
+                              <a:solidFill>
+                                <a:schemeClr val="dk1"/>
+                              </a:solidFill>
+                              <a:effectLst/>
+                              <a:latin typeface="+mn-lt"/>
+                              <a:ea typeface="+mn-ea"/>
+                              <a:cs typeface="+mn-cs"/>
+                            </a:rPr>
+                            <a:t>(5) Advanced Topic Teaser on self-excitatory processes: point processes that are not NHPPPs and when you may need them</a:t>
+                          </a:r>
+                        </a:p>
+                      </a:txBody>
+                      <a:tcPr/>
+                    </a:tc>
+                    <a:tc>
+                      <a:txBody>
+                        <a:bodyPr/>
+                        <a:lstStyle/>
+                        <a:p>
+                          <a:r>
+                            <a:rPr lang="en-US" dirty="0"/>
+                            <a:t>Trikalinos</a:t>
+                          </a:r>
+                        </a:p>
+                      </a:txBody>
+                      <a:tcPr/>
+                    </a:tc>
+                    <a:extLst>
+                      <a:ext uri="{0D108BD9-81ED-4DB2-BD59-A6C34878D82A}">
+                        <a16:rowId xmlns:a16="http://schemas.microsoft.com/office/drawing/2014/main" val="3766472740"/>
+                      </a:ext>
+                    </a:extLst>
+                  </a:tr>
+                  <a:tr h="370840">
+                    <a:tc>
+                      <a:txBody>
+                        <a:bodyPr/>
+                        <a:lstStyle/>
+                        <a:p>
+                          <a:r>
+                            <a:rPr lang="en-US" dirty="0"/>
+                            <a:t>[15 min]</a:t>
+                          </a:r>
+                        </a:p>
+                      </a:txBody>
+                      <a:tcPr/>
+                    </a:tc>
+                    <a:tc>
+                      <a:txBody>
+                        <a:bodyPr/>
+                        <a:lstStyle/>
+                        <a:p>
+                          <a:r>
+                            <a:rPr lang="en-US" dirty="0"/>
+                            <a:t>General Q &amp; A</a:t>
+                          </a:r>
+                        </a:p>
+                      </a:txBody>
+                      <a:tcPr/>
+                    </a:tc>
+                    <a:tc>
+                      <a:txBody>
+                        <a:bodyPr/>
+                        <a:lstStyle/>
+                        <a:p>
+                          <a:r>
+                            <a:rPr lang="en-US" dirty="0"/>
+                            <a:t>All</a:t>
+                          </a:r>
+                        </a:p>
+                      </a:txBody>
+                      <a:tcPr/>
+                    </a:tc>
+                    <a:extLst>
+                      <a:ext uri="{0D108BD9-81ED-4DB2-BD59-A6C34878D82A}">
+                        <a16:rowId xmlns:a16="http://schemas.microsoft.com/office/drawing/2014/main" val="3034331301"/>
+                      </a:ext>
+                    </a:extLst>
+                  </a:tr>
+                </a:tbl>
+              </a:graphicData>
+            </a:graphic>
+          </p:graphicFrame>
+        </mc:Choice>
+        <mc:Fallback>
+          <p:graphicFrame>
+            <p:nvGraphicFramePr>
+              <p:cNvPr id="7" name="Content Placeholder 3">
+                <a:extLst>
+                  <a:ext uri="{FF2B5EF4-FFF2-40B4-BE49-F238E27FC236}">
+                    <a16:creationId xmlns:a16="http://schemas.microsoft.com/office/drawing/2014/main" id="{52DDDD06-E807-C276-7248-8305B3CBD17D}"/>
+                  </a:ext>
+                </a:extLst>
+              </p:cNvPr>
+              <p:cNvGraphicFramePr>
+                <a:graphicFrameLocks/>
+              </p:cNvGraphicFramePr>
+              <p:nvPr>
+                <p:extLst>
+                  <p:ext uri="{D42A27DB-BD31-4B8C-83A1-F6EECF244321}">
+                    <p14:modId xmlns:p14="http://schemas.microsoft.com/office/powerpoint/2010/main" val="260976388"/>
+                  </p:ext>
+                </p:extLst>
+              </p:nvPr>
+            </p:nvGraphicFramePr>
+            <p:xfrm>
+              <a:off x="1208690" y="942340"/>
+              <a:ext cx="10720551" cy="4699000"/>
+            </p:xfrm>
+            <a:graphic>
+              <a:graphicData uri="http://schemas.openxmlformats.org/drawingml/2006/table">
+                <a:tbl>
+                  <a:tblPr firstRow="1" bandRow="1">
+                    <a:tableStyleId>{21E4AEA4-8DFA-4A89-87EB-49C32662AFE0}</a:tableStyleId>
+                  </a:tblPr>
+                  <a:tblGrid>
+                    <a:gridCol w="1717110">
+                      <a:extLst>
+                        <a:ext uri="{9D8B030D-6E8A-4147-A177-3AD203B41FA5}">
+                          <a16:colId xmlns:a16="http://schemas.microsoft.com/office/drawing/2014/main" val="4182014441"/>
+                        </a:ext>
+                      </a:extLst>
+                    </a:gridCol>
+                    <a:gridCol w="5976462">
+                      <a:extLst>
+                        <a:ext uri="{9D8B030D-6E8A-4147-A177-3AD203B41FA5}">
+                          <a16:colId xmlns:a16="http://schemas.microsoft.com/office/drawing/2014/main" val="906180283"/>
+                        </a:ext>
+                      </a:extLst>
+                    </a:gridCol>
+                    <a:gridCol w="3026979">
+                      <a:extLst>
+                        <a:ext uri="{9D8B030D-6E8A-4147-A177-3AD203B41FA5}">
+                          <a16:colId xmlns:a16="http://schemas.microsoft.com/office/drawing/2014/main" val="2769721792"/>
+                        </a:ext>
+                      </a:extLst>
+                    </a:gridCol>
+                  </a:tblGrid>
+                  <a:tr h="370840">
+                    <a:tc>
+                      <a:txBody>
+                        <a:bodyPr/>
+                        <a:lstStyle/>
+                        <a:p>
+                          <a:r>
+                            <a:rPr lang="en-US" dirty="0"/>
+                            <a:t>Time</a:t>
+                          </a:r>
+                        </a:p>
+                      </a:txBody>
+                      <a:tcPr/>
+                    </a:tc>
+                    <a:tc>
+                      <a:txBody>
+                        <a:bodyPr/>
+                        <a:lstStyle/>
+                        <a:p>
+                          <a:r>
+                            <a:rPr lang="en-US" dirty="0"/>
+                            <a:t>Description</a:t>
+                          </a:r>
+                        </a:p>
+                      </a:txBody>
+                      <a:tcPr/>
+                    </a:tc>
+                    <a:tc>
+                      <a:txBody>
+                        <a:bodyPr/>
+                        <a:lstStyle/>
+                        <a:p>
+                          <a:r>
+                            <a:rPr lang="en-US" dirty="0"/>
+                            <a:t>Discussant</a:t>
+                          </a:r>
+                        </a:p>
+                      </a:txBody>
+                      <a:tcPr/>
+                    </a:tc>
+                    <a:extLst>
+                      <a:ext uri="{0D108BD9-81ED-4DB2-BD59-A6C34878D82A}">
+                        <a16:rowId xmlns:a16="http://schemas.microsoft.com/office/drawing/2014/main" val="1700444250"/>
+                      </a:ext>
+                    </a:extLst>
+                  </a:tr>
+                  <a:tr h="370840">
+                    <a:tc>
+                      <a:txBody>
+                        <a:bodyPr/>
+                        <a:lstStyle/>
+                        <a:p>
+                          <a:r>
+                            <a:rPr lang="en-US" dirty="0"/>
+                            <a:t>[15 min]</a:t>
+                          </a:r>
+                        </a:p>
+                      </a:txBody>
+                      <a:tcPr/>
+                    </a:tc>
+                    <a:tc>
+                      <a:txBody>
+                        <a:bodyPr/>
+                        <a:lstStyle/>
+                        <a:p>
+                          <a:r>
+                            <a:rPr lang="en-US" sz="1800" kern="1200" dirty="0">
+                              <a:solidFill>
+                                <a:schemeClr val="dk1"/>
+                              </a:solidFill>
+                              <a:effectLst/>
+                              <a:latin typeface="+mn-lt"/>
+                              <a:ea typeface="+mn-ea"/>
+                              <a:cs typeface="+mn-cs"/>
+                            </a:rPr>
+                            <a:t>(0) Introductions and administrivia </a:t>
+                          </a:r>
+                          <a:endParaRPr lang="en-US" dirty="0"/>
+                        </a:p>
+                      </a:txBody>
+                      <a:tcPr/>
+                    </a:tc>
+                    <a:tc>
+                      <a:txBody>
+                        <a:bodyPr/>
+                        <a:lstStyle/>
+                        <a:p>
+                          <a:r>
+                            <a:rPr lang="en-US" dirty="0" err="1"/>
+                            <a:t>Trikalinos</a:t>
+                          </a:r>
+                          <a:endParaRPr lang="en-US" dirty="0"/>
+                        </a:p>
+                      </a:txBody>
+                      <a:tcPr/>
+                    </a:tc>
+                    <a:extLst>
+                      <a:ext uri="{0D108BD9-81ED-4DB2-BD59-A6C34878D82A}">
+                        <a16:rowId xmlns:a16="http://schemas.microsoft.com/office/drawing/2014/main" val="2490995723"/>
+                      </a:ext>
+                    </a:extLst>
+                  </a:tr>
+                  <a:tr h="370840">
+                    <a:tc>
+                      <a:txBody>
+                        <a:bodyPr/>
+                        <a:lstStyle/>
+                        <a:p>
+                          <a:r>
+                            <a:rPr lang="en-US" dirty="0"/>
+                            <a:t>[25 min]</a:t>
+                          </a:r>
+                        </a:p>
+                      </a:txBody>
+                      <a:tcPr/>
+                    </a:tc>
+                    <a:tc>
+                      <a:txBody>
+                        <a:bodyPr/>
+                        <a:lstStyle/>
+                        <a:p>
+                          <a:r>
+                            <a:rPr lang="en-US" sz="1800" kern="1200" dirty="0">
+                              <a:solidFill>
+                                <a:schemeClr val="dk1"/>
+                              </a:solidFill>
+                              <a:effectLst/>
+                              <a:latin typeface="+mn-lt"/>
+                              <a:ea typeface="+mn-ea"/>
+                              <a:cs typeface="+mn-cs"/>
+                            </a:rPr>
+                            <a:t>(1) DES as a composition of point processes</a:t>
+                          </a:r>
+                        </a:p>
+                      </a:txBody>
+                      <a:tcPr/>
+                    </a:tc>
+                    <a:tc>
+                      <a:txBody>
+                        <a:bodyPr/>
+                        <a:lstStyle/>
+                        <a:p>
+                          <a:r>
+                            <a:rPr lang="en-US" dirty="0" err="1"/>
+                            <a:t>Alarid</a:t>
+                          </a:r>
+                          <a:r>
+                            <a:rPr lang="en-US" dirty="0"/>
+                            <a:t>-Escudero</a:t>
+                          </a:r>
+                        </a:p>
+                      </a:txBody>
+                      <a:tcPr/>
+                    </a:tc>
+                    <a:extLst>
+                      <a:ext uri="{0D108BD9-81ED-4DB2-BD59-A6C34878D82A}">
+                        <a16:rowId xmlns:a16="http://schemas.microsoft.com/office/drawing/2014/main" val="2065491183"/>
+                      </a:ext>
+                    </a:extLst>
+                  </a:tr>
+                  <a:tr h="370840">
+                    <a:tc>
+                      <a:txBody>
+                        <a:bodyPr/>
+                        <a:lstStyle/>
+                        <a:p>
+                          <a:r>
+                            <a:rPr lang="en-US" dirty="0"/>
+                            <a:t>[30 min]</a:t>
+                          </a:r>
+                        </a:p>
+                      </a:txBody>
+                      <a:tcPr/>
+                    </a:tc>
+                    <a:tc>
+                      <a:txBody>
+                        <a:bodyPr/>
+                        <a:lstStyle/>
+                        <a:p>
+                          <a:pPr marL="0" marR="0" lvl="0" indent="0" algn="l" defTabSz="914400" rtl="0" eaLnBrk="1" fontAlgn="auto" latinLnBrk="0" hangingPunct="1">
+                            <a:lnSpc>
+                              <a:spcPct val="100000"/>
+                            </a:lnSpc>
+                            <a:spcBef>
+                              <a:spcPts val="0"/>
+                            </a:spcBef>
+                            <a:spcAft>
+                              <a:spcPts val="0"/>
+                            </a:spcAft>
+                            <a:buClrTx/>
+                            <a:buSzTx/>
+                            <a:buFontTx/>
+                            <a:buNone/>
+                            <a:tabLst/>
+                            <a:defRPr/>
+                          </a:pPr>
+                          <a:r>
+                            <a:rPr lang="en-US" sz="1800" kern="1200" dirty="0">
+                              <a:solidFill>
+                                <a:schemeClr val="dk1"/>
+                              </a:solidFill>
+                              <a:effectLst/>
+                              <a:latin typeface="+mn-lt"/>
+                              <a:ea typeface="+mn-ea"/>
+                              <a:cs typeface="+mn-cs"/>
+                            </a:rPr>
+                            <a:t>(2) NHPPPs – key properties</a:t>
+                          </a:r>
+                        </a:p>
+                      </a:txBody>
+                      <a:tcPr/>
+                    </a:tc>
+                    <a:tc>
+                      <a:txBody>
+                        <a:bodyPr/>
+                        <a:lstStyle/>
+                        <a:p>
+                          <a:r>
+                            <a:rPr lang="en-US" dirty="0" err="1"/>
+                            <a:t>Trikalinos</a:t>
+                          </a:r>
+                          <a:endParaRPr lang="en-US" dirty="0"/>
+                        </a:p>
+                      </a:txBody>
+                      <a:tcPr/>
+                    </a:tc>
+                    <a:extLst>
+                      <a:ext uri="{0D108BD9-81ED-4DB2-BD59-A6C34878D82A}">
+                        <a16:rowId xmlns:a16="http://schemas.microsoft.com/office/drawing/2014/main" val="2757944147"/>
+                      </a:ext>
+                    </a:extLst>
+                  </a:tr>
+                  <a:tr h="370840">
+                    <a:tc>
+                      <a:txBody>
+                        <a:bodyPr/>
+                        <a:lstStyle/>
+                        <a:p>
+                          <a:r>
+                            <a:rPr lang="en-US" dirty="0"/>
+                            <a:t>[30 min]</a:t>
+                          </a:r>
+                        </a:p>
+                      </a:txBody>
+                      <a:tcPr/>
+                    </a:tc>
+                    <a:tc>
+                      <a:txBody>
+                        <a:bodyPr/>
+                        <a:lstStyle/>
+                        <a:p>
+                          <a:r>
+                            <a:rPr lang="en-US" sz="1800" kern="1200" dirty="0">
+                              <a:solidFill>
+                                <a:schemeClr val="dk1"/>
+                              </a:solidFill>
+                              <a:effectLst/>
+                              <a:latin typeface="+mn-lt"/>
+                              <a:ea typeface="+mn-ea"/>
+                              <a:cs typeface="+mn-cs"/>
+                            </a:rPr>
+                            <a:t>(3) Sampling from NHPPPs</a:t>
+                          </a:r>
+                          <a:endParaRPr lang="en-US" dirty="0"/>
+                        </a:p>
+                      </a:txBody>
+                      <a:tcPr/>
+                    </a:tc>
+                    <a:tc>
+                      <a:txBody>
+                        <a:bodyPr/>
+                        <a:lstStyle/>
+                        <a:p>
+                          <a:pPr marL="0" marR="0" lvl="0" indent="0" algn="l" defTabSz="914400" rtl="0" eaLnBrk="1" fontAlgn="auto" latinLnBrk="0" hangingPunct="1">
+                            <a:lnSpc>
+                              <a:spcPct val="100000"/>
+                            </a:lnSpc>
+                            <a:spcBef>
+                              <a:spcPts val="0"/>
+                            </a:spcBef>
+                            <a:spcAft>
+                              <a:spcPts val="0"/>
+                            </a:spcAft>
+                            <a:buClrTx/>
+                            <a:buSzTx/>
+                            <a:buFontTx/>
+                            <a:buNone/>
+                            <a:tabLst/>
+                            <a:defRPr/>
+                          </a:pPr>
+                          <a:r>
+                            <a:rPr lang="en-US" dirty="0"/>
+                            <a:t>Trikalinos</a:t>
+                          </a:r>
+                        </a:p>
+                      </a:txBody>
+                      <a:tcPr/>
+                    </a:tc>
+                    <a:extLst>
+                      <a:ext uri="{0D108BD9-81ED-4DB2-BD59-A6C34878D82A}">
+                        <a16:rowId xmlns:a16="http://schemas.microsoft.com/office/drawing/2014/main" val="1442363784"/>
+                      </a:ext>
+                    </a:extLst>
+                  </a:tr>
+                  <a:tr h="370840">
+                    <a:tc>
+                      <a:txBody>
+                        <a:bodyPr/>
+                        <a:lstStyle/>
+                        <a:p>
+                          <a:r>
+                            <a:rPr lang="en-US" dirty="0"/>
+                            <a:t>[15 min]</a:t>
+                          </a:r>
+                        </a:p>
+                      </a:txBody>
+                      <a:tcPr/>
+                    </a:tc>
+                    <a:tc>
+                      <a:txBody>
+                        <a:bodyPr/>
+                        <a:lstStyle/>
+                        <a:p>
+                          <a:pPr marL="0" marR="0" lvl="0" indent="0" algn="l" defTabSz="914400" rtl="0" eaLnBrk="1" fontAlgn="auto" latinLnBrk="0" hangingPunct="1">
+                            <a:lnSpc>
+                              <a:spcPct val="100000"/>
+                            </a:lnSpc>
+                            <a:spcBef>
+                              <a:spcPts val="0"/>
+                            </a:spcBef>
+                            <a:spcAft>
+                              <a:spcPts val="0"/>
+                            </a:spcAft>
+                            <a:buClrTx/>
+                            <a:buSzTx/>
+                            <a:buFontTx/>
+                            <a:buNone/>
+                            <a:tabLst/>
+                            <a:defRPr/>
+                          </a:pPr>
+                          <a:r>
+                            <a:rPr lang="en-US" b="1" dirty="0"/>
+                            <a:t>Break</a:t>
+                          </a:r>
+                        </a:p>
+                      </a:txBody>
+                      <a:tcPr/>
+                    </a:tc>
+                    <a:tc>
+                      <a:txBody>
+                        <a:bodyPr/>
+                        <a:lstStyle/>
+                        <a:p>
+                          <a:endParaRPr lang="en-US" dirty="0"/>
+                        </a:p>
+                      </a:txBody>
+                      <a:tcPr/>
+                    </a:tc>
+                    <a:extLst>
+                      <a:ext uri="{0D108BD9-81ED-4DB2-BD59-A6C34878D82A}">
+                        <a16:rowId xmlns:a16="http://schemas.microsoft.com/office/drawing/2014/main" val="1269228105"/>
+                      </a:ext>
+                    </a:extLst>
+                  </a:tr>
+                  <a:tr h="1188720">
+                    <a:tc>
+                      <a:txBody>
+                        <a:bodyPr/>
+                        <a:lstStyle/>
+                        <a:p>
+                          <a:r>
+                            <a:rPr lang="en-US" dirty="0"/>
+                            <a:t>[80 min]</a:t>
+                          </a:r>
+                        </a:p>
+                      </a:txBody>
+                      <a:tcPr/>
+                    </a:tc>
+                    <a:tc>
+                      <a:txBody>
+                        <a:bodyPr/>
+                        <a:lstStyle/>
+                        <a:p>
+                          <a:endParaRPr lang="en-US"/>
+                        </a:p>
+                      </a:txBody>
+                      <a:tcPr>
+                        <a:blipFill>
+                          <a:blip r:embed="rId3"/>
+                          <a:stretch>
+                            <a:fillRect l="-28875" t="-189362" r="-51168" b="-114894"/>
+                          </a:stretch>
+                        </a:blipFill>
+                      </a:tcPr>
+                    </a:tc>
+                    <a:tc>
+                      <a:txBody>
+                        <a:bodyPr/>
+                        <a:lstStyle/>
+                        <a:p>
+                          <a:r>
+                            <a:rPr lang="en-US" dirty="0"/>
+                            <a:t>[All]</a:t>
+                          </a:r>
+                        </a:p>
+                        <a:p>
+                          <a:r>
+                            <a:rPr lang="en-US" dirty="0"/>
+                            <a:t>Trikalinos</a:t>
+                          </a:r>
+                        </a:p>
+                        <a:p>
+                          <a:r>
+                            <a:rPr lang="en-US" dirty="0"/>
+                            <a:t>Sereda</a:t>
+                          </a:r>
+                        </a:p>
+                        <a:p>
+                          <a:pPr marL="0" marR="0" lvl="0" indent="0" algn="l" defTabSz="914400" rtl="0" eaLnBrk="1" fontAlgn="auto" latinLnBrk="0" hangingPunct="1">
+                            <a:lnSpc>
+                              <a:spcPct val="100000"/>
+                            </a:lnSpc>
+                            <a:spcBef>
+                              <a:spcPts val="0"/>
+                            </a:spcBef>
+                            <a:spcAft>
+                              <a:spcPts val="0"/>
+                            </a:spcAft>
+                            <a:buClrTx/>
+                            <a:buSzTx/>
+                            <a:buFontTx/>
+                            <a:buNone/>
+                            <a:tabLst/>
+                            <a:defRPr/>
+                          </a:pPr>
+                          <a:r>
+                            <a:rPr lang="en-US" dirty="0"/>
+                            <a:t>Sereda</a:t>
+                          </a:r>
+                        </a:p>
+                      </a:txBody>
+                      <a:tcPr/>
+                    </a:tc>
+                    <a:extLst>
+                      <a:ext uri="{0D108BD9-81ED-4DB2-BD59-A6C34878D82A}">
+                        <a16:rowId xmlns:a16="http://schemas.microsoft.com/office/drawing/2014/main" val="1448491104"/>
+                      </a:ext>
+                    </a:extLst>
+                  </a:tr>
+                  <a:tr h="914400">
+                    <a:tc>
+                      <a:txBody>
+                        <a:bodyPr/>
+                        <a:lstStyle/>
+                        <a:p>
+                          <a:r>
+                            <a:rPr lang="en-US" dirty="0"/>
+                            <a:t>[5 min]</a:t>
+                          </a:r>
+                        </a:p>
+                      </a:txBody>
+                      <a:tcPr/>
+                    </a:tc>
+                    <a:tc>
+                      <a:txBody>
+                        <a:bodyPr/>
+                        <a:lstStyle/>
+                        <a:p>
+                          <a:pPr marL="0" marR="0" lvl="0" indent="0" algn="l" defTabSz="914400" rtl="0" eaLnBrk="1" fontAlgn="auto" latinLnBrk="0" hangingPunct="1">
+                            <a:lnSpc>
+                              <a:spcPct val="100000"/>
+                            </a:lnSpc>
+                            <a:spcBef>
+                              <a:spcPts val="0"/>
+                            </a:spcBef>
+                            <a:spcAft>
+                              <a:spcPts val="0"/>
+                            </a:spcAft>
+                            <a:buClrTx/>
+                            <a:buSzTx/>
+                            <a:buFontTx/>
+                            <a:buNone/>
+                            <a:tabLst/>
+                            <a:defRPr/>
+                          </a:pPr>
+                          <a:r>
+                            <a:rPr lang="en-US" sz="1800" kern="1200" dirty="0">
+                              <a:solidFill>
+                                <a:schemeClr val="dk1"/>
+                              </a:solidFill>
+                              <a:effectLst/>
+                              <a:latin typeface="+mn-lt"/>
+                              <a:ea typeface="+mn-ea"/>
+                              <a:cs typeface="+mn-cs"/>
+                            </a:rPr>
+                            <a:t>(5) Advanced Topic Teaser on self-excitatory processes: point processes that are not NHPPPs and when you may need them</a:t>
+                          </a:r>
+                        </a:p>
+                      </a:txBody>
+                      <a:tcPr/>
+                    </a:tc>
+                    <a:tc>
+                      <a:txBody>
+                        <a:bodyPr/>
+                        <a:lstStyle/>
+                        <a:p>
+                          <a:r>
+                            <a:rPr lang="en-US" dirty="0"/>
+                            <a:t>Trikalinos</a:t>
+                          </a:r>
+                        </a:p>
+                      </a:txBody>
+                      <a:tcPr/>
+                    </a:tc>
+                    <a:extLst>
+                      <a:ext uri="{0D108BD9-81ED-4DB2-BD59-A6C34878D82A}">
+                        <a16:rowId xmlns:a16="http://schemas.microsoft.com/office/drawing/2014/main" val="3766472740"/>
+                      </a:ext>
+                    </a:extLst>
+                  </a:tr>
+                  <a:tr h="370840">
+                    <a:tc>
+                      <a:txBody>
+                        <a:bodyPr/>
+                        <a:lstStyle/>
+                        <a:p>
+                          <a:r>
+                            <a:rPr lang="en-US" dirty="0"/>
+                            <a:t>[15 min]</a:t>
+                          </a:r>
+                        </a:p>
+                      </a:txBody>
+                      <a:tcPr/>
+                    </a:tc>
+                    <a:tc>
+                      <a:txBody>
+                        <a:bodyPr/>
+                        <a:lstStyle/>
+                        <a:p>
+                          <a:r>
+                            <a:rPr lang="en-US" dirty="0"/>
+                            <a:t>General Q &amp; A</a:t>
+                          </a:r>
+                        </a:p>
+                      </a:txBody>
+                      <a:tcPr/>
+                    </a:tc>
+                    <a:tc>
+                      <a:txBody>
+                        <a:bodyPr/>
+                        <a:lstStyle/>
+                        <a:p>
+                          <a:r>
+                            <a:rPr lang="en-US" dirty="0"/>
+                            <a:t>All</a:t>
+                          </a:r>
+                        </a:p>
+                      </a:txBody>
+                      <a:tcPr/>
+                    </a:tc>
+                    <a:extLst>
+                      <a:ext uri="{0D108BD9-81ED-4DB2-BD59-A6C34878D82A}">
+                        <a16:rowId xmlns:a16="http://schemas.microsoft.com/office/drawing/2014/main" val="3034331301"/>
+                      </a:ext>
+                    </a:extLst>
+                  </a:tr>
+                </a:tbl>
+              </a:graphicData>
+            </a:graphic>
+          </p:graphicFrame>
+        </mc:Fallback>
+      </mc:AlternateContent>
       <p:sp>
         <p:nvSpPr>
-          <p:cNvPr id="3" name="TextBox 2">
-            <a:extLst>
-              <a:ext uri="{FF2B5EF4-FFF2-40B4-BE49-F238E27FC236}">
-                <a16:creationId xmlns:a16="http://schemas.microsoft.com/office/drawing/2014/main" id="{30C6626D-CE7F-C7C3-BB6A-95BAC987A97F}"/>
+          <p:cNvPr id="8" name="TextBox 7">
+            <a:extLst>
+              <a:ext uri="{FF2B5EF4-FFF2-40B4-BE49-F238E27FC236}">
+                <a16:creationId xmlns:a16="http://schemas.microsoft.com/office/drawing/2014/main" id="{4A132CD6-83D1-57C1-F108-09728AC07966}"/>
               </a:ext>
             </a:extLst>
           </p:cNvPr>
@@ -13990,7 +15545,7 @@
           <a:p>
             <a:r>
               <a:rPr lang="en-US" sz="2400" dirty="0"/>
-              <a:t>Sunday 15</a:t>
+              <a:t>Sunday 28</a:t>
             </a:r>
             <a:r>
               <a:rPr lang="en-US" sz="2400" baseline="30000" dirty="0"/>
@@ -13998,13 +15553,18 @@
             </a:r>
             <a:r>
               <a:rPr lang="en-US" sz="2400" dirty="0"/>
-              <a:t> of June</a:t>
-            </a:r>
-            <a:r>
-              <a:rPr lang="en-US" sz="2400"/>
-              <a:t>, 9:00 to 12:30</a:t>
-            </a:r>
-            <a:endParaRPr lang="en-US" sz="2400" dirty="0"/>
+              <a:t> of June, 8:35 to 12:</a:t>
+            </a:r>
+            <a:r>
+              <a:rPr lang="en-US" sz="2400" dirty="0">
+                <a:sym typeface="Wingdings" pitchFamily="2" charset="2"/>
+              </a:rPr>
+              <a:t>0</a:t>
+            </a:r>
+            <a:r>
+              <a:rPr lang="en-US" sz="2400" dirty="0"/>
+              <a:t>0</a:t>
+            </a:r>
           </a:p>
         </p:txBody>
       </p:sp>
@@ -15209,10 +16769,10 @@
           <p:nvPr/>
         </p:nvPicPr>
         <p:blipFill>
-          <a:blip r:embed="rId3">
+          <a:blip>
             <a:extLst>
               <a:ext uri="{96DAC541-7B7A-43D3-8B79-37D633B846F1}">
-                <asvg:svgBlip xmlns:asvg="http://schemas.microsoft.com/office/drawing/2016/SVG/main" r:embed="rId4"/>
+                <asvg:svgBlip xmlns:asvg="http://schemas.microsoft.com/office/drawing/2016/SVG/main" r:embed="rId3"/>
               </a:ext>
             </a:extLst>
           </a:blip>
@@ -16155,10 +17715,10 @@
           <p:nvPr/>
         </p:nvPicPr>
         <p:blipFill>
-          <a:blip r:embed="rId5">
+          <a:blip>
             <a:extLst>
               <a:ext uri="{96DAC541-7B7A-43D3-8B79-37D633B846F1}">
-                <asvg:svgBlip xmlns:asvg="http://schemas.microsoft.com/office/drawing/2016/SVG/main" r:embed="rId6"/>
+                <asvg:svgBlip xmlns:asvg="http://schemas.microsoft.com/office/drawing/2016/SVG/main" r:embed="rId4"/>
               </a:ext>
             </a:extLst>
           </a:blip>
@@ -16629,10 +18189,10 @@
           <p:nvPr/>
         </p:nvPicPr>
         <p:blipFill>
-          <a:blip r:embed="rId3">
+          <a:blip>
             <a:extLst>
               <a:ext uri="{96DAC541-7B7A-43D3-8B79-37D633B846F1}">
-                <asvg:svgBlip xmlns:asvg="http://schemas.microsoft.com/office/drawing/2016/SVG/main" r:embed="rId4"/>
+                <asvg:svgBlip xmlns:asvg="http://schemas.microsoft.com/office/drawing/2016/SVG/main" r:embed="rId3"/>
               </a:ext>
             </a:extLst>
           </a:blip>
@@ -18206,10 +19766,10 @@
           <p:nvPr/>
         </p:nvPicPr>
         <p:blipFill>
-          <a:blip r:embed="rId3">
+          <a:blip>
             <a:extLst>
               <a:ext uri="{96DAC541-7B7A-43D3-8B79-37D633B846F1}">
-                <asvg:svgBlip xmlns:asvg="http://schemas.microsoft.com/office/drawing/2016/SVG/main" r:embed="rId4"/>
+                <asvg:svgBlip xmlns:asvg="http://schemas.microsoft.com/office/drawing/2016/SVG/main" r:embed="rId3"/>
               </a:ext>
             </a:extLst>
           </a:blip>
@@ -19152,10 +20712,10 @@
           <p:nvPr/>
         </p:nvPicPr>
         <p:blipFill>
-          <a:blip r:embed="rId5">
+          <a:blip>
             <a:extLst>
               <a:ext uri="{96DAC541-7B7A-43D3-8B79-37D633B846F1}">
-                <asvg:svgBlip xmlns:asvg="http://schemas.microsoft.com/office/drawing/2016/SVG/main" r:embed="rId6"/>
+                <asvg:svgBlip xmlns:asvg="http://schemas.microsoft.com/office/drawing/2016/SVG/main" r:embed="rId4"/>
               </a:ext>
             </a:extLst>
           </a:blip>
@@ -19626,10 +21186,10 @@
           <p:nvPr/>
         </p:nvPicPr>
         <p:blipFill>
-          <a:blip r:embed="rId3">
+          <a:blip>
             <a:extLst>
               <a:ext uri="{96DAC541-7B7A-43D3-8B79-37D633B846F1}">
-                <asvg:svgBlip xmlns:asvg="http://schemas.microsoft.com/office/drawing/2016/SVG/main" r:embed="rId4"/>
+                <asvg:svgBlip xmlns:asvg="http://schemas.microsoft.com/office/drawing/2016/SVG/main" r:embed="rId3"/>
               </a:ext>
             </a:extLst>
           </a:blip>
@@ -21030,17 +22590,6 @@
 </file>
 
 <file path=customXml/item1.xml><?xml version="1.0" encoding="utf-8"?>
-<p:properties xmlns:p="http://schemas.microsoft.com/office/2006/metadata/properties" xmlns:xsi="http://www.w3.org/2001/XMLSchema-instance" xmlns:pc="http://schemas.microsoft.com/office/infopath/2007/PartnerControls">
-  <documentManagement>
-    <TaxCatchAll xmlns="b6c9d19c-b34a-4cf4-8ebf-64c63fc48083" xsi:nil="true"/>
-    <lcf76f155ced4ddcb4097134ff3c332f xmlns="33f92c16-e346-46b5-ac57-2b519ac4cf68">
-      <Terms xmlns="http://schemas.microsoft.com/office/infopath/2007/PartnerControls"/>
-    </lcf76f155ced4ddcb4097134ff3c332f>
-  </documentManagement>
-</p:properties>
-</file>
-
-<file path=customXml/item2.xml><?xml version="1.0" encoding="utf-8"?>
 <?mso-contentType ?>
 <FormTemplates xmlns="http://schemas.microsoft.com/sharepoint/v3/contenttype/forms">
   <Display>DocumentLibraryForm</Display>
@@ -21049,7 +22598,7 @@
 </FormTemplates>
 </file>
 
-<file path=customXml/item3.xml><?xml version="1.0" encoding="utf-8"?>
+<file path=customXml/item2.xml><?xml version="1.0" encoding="utf-8"?>
 <ct:contentTypeSchema xmlns:ct="http://schemas.microsoft.com/office/2006/metadata/contentType" xmlns:ma="http://schemas.microsoft.com/office/2006/metadata/properties/metaAttributes" ct:_="" ma:_="" ma:contentTypeName="Document" ma:contentTypeID="0x0101007069032936BB004A979B3FCE77DE1EB1" ma:contentTypeVersion="16" ma:contentTypeDescription="Create a new document." ma:contentTypeScope="" ma:versionID="59b39aa881a230c9f06045ed60478b88">
   <xsd:schema xmlns:xsd="http://www.w3.org/2001/XMLSchema" xmlns:xs="http://www.w3.org/2001/XMLSchema" xmlns:p="http://schemas.microsoft.com/office/2006/metadata/properties" xmlns:ns2="33f92c16-e346-46b5-ac57-2b519ac4cf68" xmlns:ns3="0efde304-9646-43d8-8eee-5b1a55ab17f1" xmlns:ns4="b6c9d19c-b34a-4cf4-8ebf-64c63fc48083" targetNamespace="http://schemas.microsoft.com/office/2006/metadata/properties" ma:root="true" ma:fieldsID="c596c03b60b8e16cee14ab235af6374a" ns2:_="" ns3:_="" ns4:_="">
     <xsd:import namespace="33f92c16-e346-46b5-ac57-2b519ac4cf68"/>
@@ -21289,25 +22838,18 @@
 </ct:contentTypeSchema>
 </file>
 
-<file path=customXml/itemProps1.xml><?xml version="1.0" encoding="utf-8"?>
-<ds:datastoreItem xmlns:ds="http://schemas.openxmlformats.org/officeDocument/2006/customXml" ds:itemID="{E709C047-1DE0-4980-A90A-4D5EFC165D2C}">
-  <ds:schemaRefs>
-    <ds:schemaRef ds:uri="http://schemas.microsoft.com/office/2006/documentManagement/types"/>
-    <ds:schemaRef ds:uri="0efde304-9646-43d8-8eee-5b1a55ab17f1"/>
-    <ds:schemaRef ds:uri="33f92c16-e346-46b5-ac57-2b519ac4cf68"/>
-    <ds:schemaRef ds:uri="http://purl.org/dc/elements/1.1/"/>
-    <ds:schemaRef ds:uri="http://schemas.microsoft.com/office/infopath/2007/PartnerControls"/>
-    <ds:schemaRef ds:uri="http://schemas.openxmlformats.org/package/2006/metadata/core-properties"/>
-    <ds:schemaRef ds:uri="http://purl.org/dc/terms/"/>
-    <ds:schemaRef ds:uri="http://schemas.microsoft.com/office/2006/metadata/properties"/>
-    <ds:schemaRef ds:uri="b6c9d19c-b34a-4cf4-8ebf-64c63fc48083"/>
-    <ds:schemaRef ds:uri="http://www.w3.org/XML/1998/namespace"/>
-    <ds:schemaRef ds:uri="http://purl.org/dc/dcmitype/"/>
-  </ds:schemaRefs>
-</ds:datastoreItem>
+<file path=customXml/item3.xml><?xml version="1.0" encoding="utf-8"?>
+<p:properties xmlns:p="http://schemas.microsoft.com/office/2006/metadata/properties" xmlns:xsi="http://www.w3.org/2001/XMLSchema-instance" xmlns:pc="http://schemas.microsoft.com/office/infopath/2007/PartnerControls">
+  <documentManagement>
+    <TaxCatchAll xmlns="b6c9d19c-b34a-4cf4-8ebf-64c63fc48083" xsi:nil="true"/>
+    <lcf76f155ced4ddcb4097134ff3c332f xmlns="33f92c16-e346-46b5-ac57-2b519ac4cf68">
+      <Terms xmlns="http://schemas.microsoft.com/office/infopath/2007/PartnerControls"/>
+    </lcf76f155ced4ddcb4097134ff3c332f>
+  </documentManagement>
+</p:properties>
 </file>
 
-<file path=customXml/itemProps2.xml><?xml version="1.0" encoding="utf-8"?>
+<file path=customXml/itemProps1.xml><?xml version="1.0" encoding="utf-8"?>
 <ds:datastoreItem xmlns:ds="http://schemas.openxmlformats.org/officeDocument/2006/customXml" ds:itemID="{EF0BFC65-ABD5-40EA-BAE0-821B9D6524E8}">
   <ds:schemaRefs>
     <ds:schemaRef ds:uri="http://schemas.microsoft.com/sharepoint/v3/contenttype/forms"/>
@@ -21315,7 +22857,7 @@
 </ds:datastoreItem>
 </file>
 
-<file path=customXml/itemProps3.xml><?xml version="1.0" encoding="utf-8"?>
+<file path=customXml/itemProps2.xml><?xml version="1.0" encoding="utf-8"?>
 <ds:datastoreItem xmlns:ds="http://schemas.openxmlformats.org/officeDocument/2006/customXml" ds:itemID="{2D7DA705-6300-4113-B183-485198D9C84E}">
   <ds:schemaRefs>
     <ds:schemaRef ds:uri="0efde304-9646-43d8-8eee-5b1a55ab17f1"/>
@@ -21333,4 +22875,22 @@
     <ds:schemaRef ds:uri="http://www.w3.org/2001/XMLSchema"/>
   </ds:schemaRefs>
 </ds:datastoreItem>
+</file>
+
+<file path=customXml/itemProps3.xml><?xml version="1.0" encoding="utf-8"?>
+<ds:datastoreItem xmlns:ds="http://schemas.openxmlformats.org/officeDocument/2006/customXml" ds:itemID="{E709C047-1DE0-4980-A90A-4D5EFC165D2C}">
+  <ds:schemaRefs>
+    <ds:schemaRef ds:uri="http://schemas.microsoft.com/office/2006/documentManagement/types"/>
+    <ds:schemaRef ds:uri="0efde304-9646-43d8-8eee-5b1a55ab17f1"/>
+    <ds:schemaRef ds:uri="33f92c16-e346-46b5-ac57-2b519ac4cf68"/>
+    <ds:schemaRef ds:uri="http://purl.org/dc/elements/1.1/"/>
+    <ds:schemaRef ds:uri="http://schemas.microsoft.com/office/infopath/2007/PartnerControls"/>
+    <ds:schemaRef ds:uri="http://schemas.openxmlformats.org/package/2006/metadata/core-properties"/>
+    <ds:schemaRef ds:uri="http://purl.org/dc/terms/"/>
+    <ds:schemaRef ds:uri="http://schemas.microsoft.com/office/2006/metadata/properties"/>
+    <ds:schemaRef ds:uri="b6c9d19c-b34a-4cf4-8ebf-64c63fc48083"/>
+    <ds:schemaRef ds:uri="http://www.w3.org/XML/1998/namespace"/>
+    <ds:schemaRef ds:uri="http://purl.org/dc/dcmitype/"/>
+  </ds:schemaRefs>
+</ds:datastoreItem>
 </file>